--- a/docs/chess_ai_slides.pptx
+++ b/docs/chess_ai_slides.pptx
@@ -3742,7 +3742,7 @@
               </a:spcAft>
             </a:pPr>
             <a:r>
-              <a:rPr sz="1700" b="1" i="0">
+              <a:rPr sz="1600" b="1" i="0">
                 <a:solidFill>
                   <a:srgbClr val="1A1D24"/>
                 </a:solidFill>
@@ -3761,7 +3761,7 @@
               </a:spcAft>
             </a:pPr>
             <a:r>
-              <a:rPr sz="1700" b="0" i="0">
+              <a:rPr sz="1600" b="0" i="0">
                 <a:solidFill>
                   <a:srgbClr val="1A1D24"/>
                 </a:solidFill>
@@ -3780,7 +3780,7 @@
               </a:spcAft>
             </a:pPr>
             <a:r>
-              <a:rPr sz="1700" b="1" i="0">
+              <a:rPr sz="1600" b="1" i="0">
                 <a:solidFill>
                   <a:srgbClr val="1A1D24"/>
                 </a:solidFill>
@@ -3799,7 +3799,7 @@
               </a:spcAft>
             </a:pPr>
             <a:r>
-              <a:rPr sz="1700" b="0" i="0">
+              <a:rPr sz="1600" b="0" i="0">
                 <a:solidFill>
                   <a:srgbClr val="1A1D24"/>
                 </a:solidFill>
@@ -3818,7 +3818,7 @@
               </a:spcAft>
             </a:pPr>
             <a:r>
-              <a:rPr sz="1700" b="1" i="0">
+              <a:rPr sz="1600" b="1" i="0">
                 <a:solidFill>
                   <a:srgbClr val="1A1D24"/>
                 </a:solidFill>
@@ -3837,7 +3837,7 @@
               </a:spcAft>
             </a:pPr>
             <a:r>
-              <a:rPr sz="1700" b="0" i="0">
+              <a:rPr sz="1600" b="0" i="0">
                 <a:solidFill>
                   <a:srgbClr val="1A1D24"/>
                 </a:solidFill>
@@ -3856,13 +3856,13 @@
               </a:spcAft>
             </a:pPr>
             <a:r>
-              <a:rPr sz="1700" b="1" i="0">
-                <a:solidFill>
-                  <a:srgbClr val="1A7F4B"/>
-                </a:solidFill>
-                <a:latin typeface="Segoe UI"/>
-              </a:rPr>
-              <a:t>Build guarantees, not warnings.</a:t>
+              <a:rPr sz="1600" b="1" i="0">
+                <a:solidFill>
+                  <a:srgbClr val="B3352C"/>
+                </a:solidFill>
+                <a:latin typeface="Segoe UI"/>
+              </a:rPr>
+              <a:t>Then audit the fix too.</a:t>
             </a:r>
           </a:p>
           <a:p>
@@ -3875,13 +3875,13 @@
               </a:spcAft>
             </a:pPr>
             <a:r>
-              <a:rPr sz="1700" b="0" i="0">
+              <a:rPr sz="1600" b="0" i="0">
                 <a:solidFill>
                   <a:srgbClr val="1A1D24"/>
                 </a:solidFill>
                 <a:latin typeface="Segoe UI"/>
               </a:rPr>
-              <a:t>Gating converts a silent six-hour failure into an immediate, visible one.</a:t>
+              <a:t>My gate promoted 8 of 20 candidates. Pure chance predicts 7.8 — an 8-game match could never have resolved this. The same mistake, one level up.</a:t>
             </a:r>
           </a:p>
         </p:txBody>
@@ -6962,7 +6962,7 @@
                 </a:solidFill>
                 <a:latin typeface="Segoe UI"/>
               </a:rPr>
-              <a:t>Make regression structurally impossible</a:t>
+              <a:t>Gating stopped the bleeding</a:t>
             </a:r>
           </a:p>
         </p:txBody>
@@ -7042,7 +7042,7 @@
               </a:spcAft>
             </a:pPr>
             <a:r>
-              <a:rPr sz="1700" b="1" i="0">
+              <a:rPr sz="1600" b="1" i="0">
                 <a:solidFill>
                   <a:srgbClr val="1A7F4B"/>
                 </a:solidFill>
@@ -7061,13 +7061,13 @@
               </a:spcAft>
             </a:pPr>
             <a:r>
-              <a:rPr sz="1700" b="0" i="0">
+              <a:rPr sz="1600" b="0" i="0">
                 <a:solidFill>
                   <a:srgbClr val="1A1D24"/>
                 </a:solidFill>
                 <a:latin typeface="Segoe UI"/>
               </a:rPr>
-              <a:t>Self-play always generates games from the best weights so far.</a:t>
+              <a:t>Self-play always generates from the best weights so far; new weights are promoted only after scoring ≥ 55% against the incumbent.</a:t>
             </a:r>
           </a:p>
           <a:p>
@@ -7080,13 +7080,13 @@
               </a:spcAft>
             </a:pPr>
             <a:r>
-              <a:rPr sz="1700" b="0" i="0">
+              <a:rPr sz="1600" b="0" i="0">
                 <a:solidFill>
                   <a:srgbClr val="1A1D24"/>
                 </a:solidFill>
                 <a:latin typeface="Segoe UI"/>
               </a:rPr>
-              <a:t>New weights are promoted only after scoring ≥ 55% in a head-to-head match against the incumbent.</a:t>
+              <a:t>Plus castling-aware augmentation, 128 simulations instead of 40, 80 gradient steps instead of 200.</a:t>
             </a:r>
           </a:p>
           <a:p>
@@ -7099,13 +7099,13 @@
               </a:spcAft>
             </a:pPr>
             <a:r>
-              <a:rPr sz="1700" b="1" i="0">
+              <a:rPr sz="1600" b="1" i="0">
                 <a:solidFill>
                   <a:srgbClr val="1A7F4B"/>
                 </a:solidFill>
                 <a:latin typeface="Segoe UI"/>
               </a:rPr>
-              <a:t>The deployed model cannot get worse.</a:t>
+              <a:t>199 iterations later — no regression.</a:t>
             </a:r>
           </a:p>
           <a:p>
@@ -7118,13 +7118,13 @@
               </a:spcAft>
             </a:pPr>
             <a:r>
-              <a:rPr sz="1700" b="0" i="0">
+              <a:rPr sz="1600" b="0" i="0">
                 <a:solidFill>
                   <a:srgbClr val="1A1D24"/>
                 </a:solidFill>
                 <a:latin typeface="Segoe UI"/>
               </a:rPr>
-              <a:t>Worst case: nothing is promoted — and I find out in minutes, not after six hours.</a:t>
+              <a:t>The candidates the gate rejected averaged 42.2% vs baseline (p = 0.004): self-play was still degrading the network.</a:t>
             </a:r>
           </a:p>
           <a:p>
@@ -7137,13 +7137,13 @@
               </a:spcAft>
             </a:pPr>
             <a:r>
-              <a:rPr sz="1700" b="0" i="0">
+              <a:rPr sz="1600" b="0" i="0">
                 <a:solidFill>
                   <a:srgbClr val="1A1D24"/>
                 </a:solidFill>
                 <a:latin typeface="Segoe UI"/>
               </a:rPr>
-              <a:t>Also: castling-aware augmentation, 128 simulations instead of 40, 80 gradient steps instead of 200.</a:t>
+              <a:t>The gate kept that damage out of the deployed model.</a:t>
             </a:r>
           </a:p>
         </p:txBody>
@@ -7156,7 +7156,7 @@
         </p:nvSpPr>
         <p:spPr>
           <a:xfrm>
-            <a:off x="7498079" y="2286000"/>
+            <a:off x="7498079" y="2194560"/>
             <a:ext cx="4023360" cy="1097280"/>
           </a:xfrm>
           <a:prstGeom prst="rect">
@@ -7200,7 +7200,7 @@
         </p:nvSpPr>
         <p:spPr>
           <a:xfrm>
-            <a:off x="7699247" y="2432304"/>
+            <a:off x="7699247" y="2340864"/>
             <a:ext cx="3657600" cy="1097280"/>
           </a:xfrm>
           <a:prstGeom prst="rect">
@@ -7220,7 +7220,7 @@
               </a:spcAft>
             </a:pPr>
             <a:r>
-              <a:rPr sz="1600">
+              <a:rPr sz="1500">
                 <a:solidFill>
                   <a:srgbClr val="1A1D24"/>
                 </a:solidFill>
@@ -7236,7 +7236,7 @@
               </a:spcAft>
             </a:pPr>
             <a:r>
-              <a:rPr sz="1600">
+              <a:rPr sz="1500">
                 <a:solidFill>
                   <a:srgbClr val="B3352C"/>
                 </a:solidFill>
@@ -7255,7 +7255,7 @@
         </p:nvSpPr>
         <p:spPr>
           <a:xfrm>
-            <a:off x="7498079" y="3840480"/>
+            <a:off x="7498079" y="3657600"/>
             <a:ext cx="4023360" cy="1508760"/>
           </a:xfrm>
           <a:prstGeom prst="rect">
@@ -7299,7 +7299,7 @@
         </p:nvSpPr>
         <p:spPr>
           <a:xfrm>
-            <a:off x="7498079" y="4005072"/>
+            <a:off x="7498079" y="3822192"/>
             <a:ext cx="4023360" cy="1188720"/>
           </a:xfrm>
           <a:prstGeom prst="rect">
@@ -7322,13 +7322,13 @@
               </a:spcAft>
             </a:pPr>
             <a:r>
-              <a:rPr sz="4400" b="1" i="0">
+              <a:rPr sz="3800" b="1" i="0">
                 <a:solidFill>
                   <a:srgbClr val="1A7F4B"/>
                 </a:solidFill>
                 <a:latin typeface="Segoe UI"/>
               </a:rPr>
-              <a:t>90%</a:t>
+              <a:t>46.2%</a:t>
             </a:r>
           </a:p>
           <a:p>
@@ -7347,7 +7347,7 @@
                 </a:solidFill>
                 <a:latin typeface="Segoe UI"/>
               </a:rPr>
-              <a:t>vs random, with corrected scoring</a:t>
+              <a:t>gated model vs its starting point — no detectable change</a:t>
             </a:r>
           </a:p>
         </p:txBody>
@@ -7389,7 +7389,7 @@
                 </a:solidFill>
                 <a:latin typeface="Segoe UI"/>
               </a:rPr>
-              <a:t>Prefer a guarantee over a promise to watch carefully.</a:t>
+              <a:t>v5 without the fixes: 31.2%. Gating converted a real regression into no change.</a:t>
             </a:r>
           </a:p>
         </p:txBody>

--- a/docs/chess_ai_slides.pptx
+++ b/docs/chess_ai_slides.pptx
@@ -14,7 +14,6 @@
     <p:sldId id="262" r:id="rId13"/>
     <p:sldId id="263" r:id="rId14"/>
     <p:sldId id="264" r:id="rId15"/>
-    <p:sldId id="265" r:id="rId16"/>
   </p:sldIdLst>
   <p:sldSz cx="12191695" cy="6858000" type="screen4x3"/>
   <p:notesSz cx="6858000" cy="9144000"/>
@@ -3588,512 +3587,6 @@
 </p:sld>
 </file>
 
-<file path=ppt/slides/slide10.xml><?xml version="1.0" encoding="utf-8"?>
-<p:sld xmlns:a="http://schemas.openxmlformats.org/drawingml/2006/main" xmlns:p="http://schemas.openxmlformats.org/presentationml/2006/main" xmlns:r="http://schemas.openxmlformats.org/officeDocument/2006/relationships">
-  <p:cSld>
-    <p:bg>
-      <p:bgPr>
-        <a:solidFill>
-          <a:srgbClr val="FFFFFF"/>
-        </a:solidFill>
-        <a:effectLst/>
-      </p:bgPr>
-    </p:bg>
-    <p:spTree>
-      <p:nvGrpSpPr>
-        <p:cNvPr id="1" name=""/>
-        <p:cNvGrpSpPr/>
-        <p:nvPr/>
-      </p:nvGrpSpPr>
-      <p:grpSpPr/>
-      <p:sp>
-        <p:nvSpPr>
-          <p:cNvPr id="2" name="TextBox 1"/>
-          <p:cNvSpPr txBox="1"/>
-          <p:nvPr/>
-        </p:nvSpPr>
-        <p:spPr>
-          <a:xfrm>
-            <a:off x="685800" y="411480"/>
-            <a:ext cx="10820095" cy="1234440"/>
-          </a:xfrm>
-          <a:prstGeom prst="rect">
-            <a:avLst/>
-          </a:prstGeom>
-          <a:noFill/>
-        </p:spPr>
-        <p:txBody>
-          <a:bodyPr wrap="square">
-            <a:spAutoFit/>
-          </a:bodyPr>
-          <a:lstStyle/>
-          <a:p>
-            <a:pPr algn="l">
-              <a:spcBef>
-                <a:spcPts val="0"/>
-              </a:spcBef>
-              <a:spcAft>
-                <a:spcPts val="400"/>
-              </a:spcAft>
-            </a:pPr>
-            <a:r>
-              <a:rPr sz="1300" b="1" i="0">
-                <a:solidFill>
-                  <a:srgbClr val="1F4E9C"/>
-                </a:solidFill>
-                <a:latin typeface="Segoe UI"/>
-              </a:rPr>
-              <a:t>WHAT I TAKE AWAY</a:t>
-            </a:r>
-          </a:p>
-          <a:p>
-            <a:pPr algn="l">
-              <a:spcBef>
-                <a:spcPts val="0"/>
-              </a:spcBef>
-              <a:spcAft>
-                <a:spcPts val="0"/>
-              </a:spcAft>
-            </a:pPr>
-            <a:r>
-              <a:rPr sz="3300" b="1" i="0">
-                <a:solidFill>
-                  <a:srgbClr val="1A1D24"/>
-                </a:solidFill>
-                <a:latin typeface="Segoe UI"/>
-              </a:rPr>
-              <a:t>Measurement is the hard part</a:t>
-            </a:r>
-          </a:p>
-        </p:txBody>
-      </p:sp>
-      <p:sp>
-        <p:nvSpPr>
-          <p:cNvPr id="3" name="Rectangle 2"/>
-          <p:cNvSpPr/>
-          <p:nvPr/>
-        </p:nvSpPr>
-        <p:spPr>
-          <a:xfrm>
-            <a:off x="685800" y="1572768"/>
-            <a:ext cx="1371600" cy="38100"/>
-          </a:xfrm>
-          <a:prstGeom prst="rect">
-            <a:avLst/>
-          </a:prstGeom>
-          <a:solidFill>
-            <a:srgbClr val="1F4E9C"/>
-          </a:solidFill>
-          <a:ln>
-            <a:noFill/>
-          </a:ln>
-          <a:effectLst/>
-        </p:spPr>
-        <p:style>
-          <a:lnRef idx="1">
-            <a:schemeClr val="accent1"/>
-          </a:lnRef>
-          <a:fillRef idx="3">
-            <a:schemeClr val="accent1"/>
-          </a:fillRef>
-          <a:effectRef idx="2">
-            <a:schemeClr val="accent1"/>
-          </a:effectRef>
-          <a:fontRef idx="minor">
-            <a:schemeClr val="lt1"/>
-          </a:fontRef>
-        </p:style>
-        <p:txBody>
-          <a:bodyPr rtlCol="0" anchor="ctr"/>
-          <a:lstStyle/>
-          <a:p>
-            <a:pPr algn="ctr"/>
-          </a:p>
-        </p:txBody>
-      </p:sp>
-      <p:sp>
-        <p:nvSpPr>
-          <p:cNvPr id="4" name="TextBox 3"/>
-          <p:cNvSpPr txBox="1"/>
-          <p:nvPr/>
-        </p:nvSpPr>
-        <p:spPr>
-          <a:xfrm>
-            <a:off x="685800" y="1874519"/>
-            <a:ext cx="6949440" cy="4434841"/>
-          </a:xfrm>
-          <a:prstGeom prst="rect">
-            <a:avLst/>
-          </a:prstGeom>
-          <a:noFill/>
-        </p:spPr>
-        <p:txBody>
-          <a:bodyPr wrap="square">
-            <a:spAutoFit/>
-          </a:bodyPr>
-          <a:lstStyle/>
-          <a:p>
-            <a:pPr algn="l">
-              <a:spcBef>
-                <a:spcPts val="0"/>
-              </a:spcBef>
-              <a:spcAft>
-                <a:spcPts val="1300"/>
-              </a:spcAft>
-            </a:pPr>
-            <a:r>
-              <a:rPr sz="1600" b="1" i="0">
-                <a:solidFill>
-                  <a:srgbClr val="1A1D24"/>
-                </a:solidFill>
-                <a:latin typeface="Segoe UI"/>
-              </a:rPr>
-              <a:t>A falling loss curve is not evidence that anything is working.</a:t>
-            </a:r>
-          </a:p>
-          <a:p>
-            <a:pPr algn="l">
-              <a:spcBef>
-                <a:spcPts val="0"/>
-              </a:spcBef>
-              <a:spcAft>
-                <a:spcPts val="1300"/>
-              </a:spcAft>
-            </a:pPr>
-            <a:r>
-              <a:rPr sz="1600" b="0" i="0">
-                <a:solidFill>
-                  <a:srgbClr val="1A1D24"/>
-                </a:solidFill>
-                <a:latin typeface="Segoe UI"/>
-              </a:rPr>
-              <a:t>Especially when the model produces its own labels.</a:t>
-            </a:r>
-          </a:p>
-          <a:p>
-            <a:pPr algn="l">
-              <a:spcBef>
-                <a:spcPts val="0"/>
-              </a:spcBef>
-              <a:spcAft>
-                <a:spcPts val="1300"/>
-              </a:spcAft>
-            </a:pPr>
-            <a:r>
-              <a:rPr sz="1600" b="1" i="0">
-                <a:solidFill>
-                  <a:srgbClr val="1A1D24"/>
-                </a:solidFill>
-                <a:latin typeface="Segoe UI"/>
-              </a:rPr>
-              <a:t>Verify the metric before trusting the model.</a:t>
-            </a:r>
-          </a:p>
-          <a:p>
-            <a:pPr algn="l">
-              <a:spcBef>
-                <a:spcPts val="0"/>
-              </a:spcBef>
-              <a:spcAft>
-                <a:spcPts val="1300"/>
-              </a:spcAft>
-            </a:pPr>
-            <a:r>
-              <a:rPr sz="1600" b="0" i="0">
-                <a:solidFill>
-                  <a:srgbClr val="1A1D24"/>
-                </a:solidFill>
-                <a:latin typeface="Segoe UI"/>
-              </a:rPr>
-              <a:t>Mine returned a plausible number 159 times in a row while measuring nothing at all.</a:t>
-            </a:r>
-          </a:p>
-          <a:p>
-            <a:pPr algn="l">
-              <a:spcBef>
-                <a:spcPts val="0"/>
-              </a:spcBef>
-              <a:spcAft>
-                <a:spcPts val="1300"/>
-              </a:spcAft>
-            </a:pPr>
-            <a:r>
-              <a:rPr sz="1600" b="1" i="0">
-                <a:solidFill>
-                  <a:srgbClr val="1A1D24"/>
-                </a:solidFill>
-                <a:latin typeface="Segoe UI"/>
-              </a:rPr>
-              <a:t>Downscaling changes which statistic matters.</a:t>
-            </a:r>
-          </a:p>
-          <a:p>
-            <a:pPr algn="l">
-              <a:spcBef>
-                <a:spcPts val="0"/>
-              </a:spcBef>
-              <a:spcAft>
-                <a:spcPts val="1300"/>
-              </a:spcAft>
-            </a:pPr>
-            <a:r>
-              <a:rPr sz="1600" b="0" i="0">
-                <a:solidFill>
-                  <a:srgbClr val="1A1D24"/>
-                </a:solidFill>
-                <a:latin typeface="Segoe UI"/>
-              </a:rPr>
-              <a:t>800 → 40 simulations preserves the best move but destroys the distribution — and the loss reads the distribution.</a:t>
-            </a:r>
-          </a:p>
-          <a:p>
-            <a:pPr algn="l">
-              <a:spcBef>
-                <a:spcPts val="0"/>
-              </a:spcBef>
-              <a:spcAft>
-                <a:spcPts val="1300"/>
-              </a:spcAft>
-            </a:pPr>
-            <a:r>
-              <a:rPr sz="1600" b="1" i="0">
-                <a:solidFill>
-                  <a:srgbClr val="B3352C"/>
-                </a:solidFill>
-                <a:latin typeface="Segoe UI"/>
-              </a:rPr>
-              <a:t>Then audit the fix too.</a:t>
-            </a:r>
-          </a:p>
-          <a:p>
-            <a:pPr algn="l">
-              <a:spcBef>
-                <a:spcPts val="0"/>
-              </a:spcBef>
-              <a:spcAft>
-                <a:spcPts val="1300"/>
-              </a:spcAft>
-            </a:pPr>
-            <a:r>
-              <a:rPr sz="1600" b="0" i="0">
-                <a:solidFill>
-                  <a:srgbClr val="1A1D24"/>
-                </a:solidFill>
-                <a:latin typeface="Segoe UI"/>
-              </a:rPr>
-              <a:t>My gate promoted 8 of 20 candidates. Pure chance predicts 7.8 — an 8-game match could never have resolved this. The same mistake, one level up.</a:t>
-            </a:r>
-          </a:p>
-        </p:txBody>
-      </p:sp>
-      <p:sp>
-        <p:nvSpPr>
-          <p:cNvPr id="5" name="Rectangle 4"/>
-          <p:cNvSpPr/>
-          <p:nvPr/>
-        </p:nvSpPr>
-        <p:spPr>
-          <a:xfrm>
-            <a:off x="8138160" y="2103120"/>
-            <a:ext cx="3291840" cy="3108960"/>
-          </a:xfrm>
-          <a:prstGeom prst="rect">
-            <a:avLst/>
-          </a:prstGeom>
-          <a:solidFill>
-            <a:srgbClr val="F2F5F9"/>
-          </a:solidFill>
-          <a:ln>
-            <a:noFill/>
-          </a:ln>
-          <a:effectLst/>
-        </p:spPr>
-        <p:style>
-          <a:lnRef idx="1">
-            <a:schemeClr val="accent1"/>
-          </a:lnRef>
-          <a:fillRef idx="3">
-            <a:schemeClr val="accent1"/>
-          </a:fillRef>
-          <a:effectRef idx="2">
-            <a:schemeClr val="accent1"/>
-          </a:effectRef>
-          <a:fontRef idx="minor">
-            <a:schemeClr val="lt1"/>
-          </a:fontRef>
-        </p:style>
-        <p:txBody>
-          <a:bodyPr rtlCol="0" anchor="ctr"/>
-          <a:lstStyle/>
-          <a:p>
-            <a:pPr algn="ctr"/>
-          </a:p>
-        </p:txBody>
-      </p:sp>
-      <p:sp>
-        <p:nvSpPr>
-          <p:cNvPr id="6" name="TextBox 5"/>
-          <p:cNvSpPr txBox="1"/>
-          <p:nvPr/>
-        </p:nvSpPr>
-        <p:spPr>
-          <a:xfrm>
-            <a:off x="8366760" y="2331720"/>
-            <a:ext cx="2834640" cy="2743200"/>
-          </a:xfrm>
-          <a:prstGeom prst="rect">
-            <a:avLst/>
-          </a:prstGeom>
-          <a:noFill/>
-        </p:spPr>
-        <p:txBody>
-          <a:bodyPr wrap="square">
-            <a:spAutoFit/>
-          </a:bodyPr>
-          <a:lstStyle/>
-          <a:p>
-            <a:pPr algn="l">
-              <a:spcBef>
-                <a:spcPts val="0"/>
-              </a:spcBef>
-              <a:spcAft>
-                <a:spcPts val="1200"/>
-              </a:spcAft>
-            </a:pPr>
-            <a:r>
-              <a:rPr sz="1700" b="1" i="0">
-                <a:solidFill>
-                  <a:srgbClr val="1F4E9C"/>
-                </a:solidFill>
-                <a:latin typeface="Segoe UI"/>
-              </a:rPr>
-              <a:t>Artifacts</a:t>
-            </a:r>
-          </a:p>
-          <a:p>
-            <a:pPr algn="l">
-              <a:spcBef>
-                <a:spcPts val="0"/>
-              </a:spcBef>
-              <a:spcAft>
-                <a:spcPts val="200"/>
-              </a:spcAft>
-            </a:pPr>
-            <a:r>
-              <a:rPr sz="1300" b="1" i="0">
-                <a:solidFill>
-                  <a:srgbClr val="5A6472"/>
-                </a:solidFill>
-                <a:latin typeface="Segoe UI"/>
-              </a:rPr>
-              <a:t>Code</a:t>
-            </a:r>
-          </a:p>
-          <a:p>
-            <a:pPr algn="l">
-              <a:spcBef>
-                <a:spcPts val="0"/>
-              </a:spcBef>
-              <a:spcAft>
-                <a:spcPts val="1200"/>
-              </a:spcAft>
-            </a:pPr>
-            <a:r>
-              <a:rPr sz="1200" b="0" i="0">
-                <a:solidFill>
-                  <a:srgbClr val="1A1D24"/>
-                </a:solidFill>
-                <a:latin typeface="Segoe UI"/>
-              </a:rPr>
-              <a:t>github.com/realgauravvyas/chess-ai</a:t>
-            </a:r>
-          </a:p>
-          <a:p>
-            <a:pPr algn="l">
-              <a:spcBef>
-                <a:spcPts val="0"/>
-              </a:spcBef>
-              <a:spcAft>
-                <a:spcPts val="200"/>
-              </a:spcAft>
-            </a:pPr>
-            <a:r>
-              <a:rPr sz="1300" b="1" i="0">
-                <a:solidFill>
-                  <a:srgbClr val="5A6472"/>
-                </a:solidFill>
-                <a:latin typeface="Segoe UI"/>
-              </a:rPr>
-              <a:t>Results</a:t>
-            </a:r>
-          </a:p>
-          <a:p>
-            <a:pPr algn="l">
-              <a:spcBef>
-                <a:spcPts val="0"/>
-              </a:spcBef>
-              <a:spcAft>
-                <a:spcPts val="1200"/>
-              </a:spcAft>
-            </a:pPr>
-            <a:r>
-              <a:rPr sz="1200" b="0" i="0">
-                <a:solidFill>
-                  <a:srgbClr val="1A1D24"/>
-                </a:solidFill>
-                <a:latin typeface="Segoe UI"/>
-              </a:rPr>
-              <a:t>RESULTS.md — every number, reproducible</a:t>
-            </a:r>
-          </a:p>
-          <a:p>
-            <a:pPr algn="l">
-              <a:spcBef>
-                <a:spcPts val="0"/>
-              </a:spcBef>
-              <a:spcAft>
-                <a:spcPts val="200"/>
-              </a:spcAft>
-            </a:pPr>
-            <a:r>
-              <a:rPr sz="1300" b="1" i="0">
-                <a:solidFill>
-                  <a:srgbClr val="5A6472"/>
-                </a:solidFill>
-                <a:latin typeface="Segoe UI"/>
-              </a:rPr>
-              <a:t>Demo</a:t>
-            </a:r>
-          </a:p>
-          <a:p>
-            <a:pPr algn="l">
-              <a:spcBef>
-                <a:spcPts val="0"/>
-              </a:spcBef>
-              <a:spcAft>
-                <a:spcPts val="0"/>
-              </a:spcAft>
-            </a:pPr>
-            <a:r>
-              <a:rPr sz="1200" b="0" i="0">
-                <a:solidFill>
-                  <a:srgbClr val="1A1D24"/>
-                </a:solidFill>
-                <a:latin typeface="Segoe UI"/>
-              </a:rPr>
-              <a:t>Live training dashboard + play any checkpoint</a:t>
-            </a:r>
-          </a:p>
-        </p:txBody>
-      </p:sp>
-    </p:spTree>
-  </p:cSld>
-  <p:clrMapOvr>
-    <a:masterClrMapping/>
-  </p:clrMapOvr>
-</p:sld>
-</file>
-
 <file path=ppt/slides/slide2.xml><?xml version="1.0" encoding="utf-8"?>
 <p:sld xmlns:a="http://schemas.openxmlformats.org/drawingml/2006/main" xmlns:p="http://schemas.openxmlformats.org/presentationml/2006/main" xmlns:r="http://schemas.openxmlformats.org/officeDocument/2006/relationships">
   <p:cSld>
@@ -4168,7 +3661,7 @@
                 </a:solidFill>
                 <a:latin typeface="Segoe UI"/>
               </a:rPr>
-              <a:t>Turning a chessboard into a tensor</a:t>
+              <a:t>From chessboard to tensor to network</a:t>
             </a:r>
           </a:p>
         </p:txBody>
@@ -4225,8 +3718,8 @@
         </p:nvSpPr>
         <p:spPr>
           <a:xfrm>
-            <a:off x="685800" y="1920240"/>
-            <a:ext cx="6858000" cy="4389120"/>
+            <a:off x="685800" y="1874519"/>
+            <a:ext cx="6949440" cy="4434841"/>
           </a:xfrm>
           <a:prstGeom prst="rect">
             <a:avLst/>
@@ -4248,7 +3741,7 @@
               </a:spcAft>
             </a:pPr>
             <a:r>
-              <a:rPr sz="1800" b="1" i="0">
+              <a:rPr sz="1600" b="1" i="0">
                 <a:solidFill>
                   <a:srgbClr val="1F4E9C"/>
                 </a:solidFill>
@@ -4267,13 +3760,13 @@
               </a:spcAft>
             </a:pPr>
             <a:r>
-              <a:rPr sz="1800" b="0" i="0">
+              <a:rPr sz="1600" b="0" i="0">
                 <a:solidFill>
                   <a:srgbClr val="1A1D24"/>
                 </a:solidFill>
                 <a:latin typeface="Segoe UI"/>
               </a:rPr>
-              <a:t>12 piece planes (6 types × 2 colours)  ·  4 castling rights  ·  1 en passant  ·  1 side to move</a:t>
+              <a:t>12 piece planes (6 types × 2 colours) · 4 castling rights · 1 en passant · 1 side to move</a:t>
             </a:r>
           </a:p>
           <a:p>
@@ -4286,7 +3779,7 @@
               </a:spcAft>
             </a:pPr>
             <a:r>
-              <a:rPr sz="1800" b="1" i="0">
+              <a:rPr sz="1600" b="1" i="0">
                 <a:solidFill>
                   <a:srgbClr val="1F4E9C"/>
                 </a:solidFill>
@@ -4305,13 +3798,13 @@
               </a:spcAft>
             </a:pPr>
             <a:r>
-              <a:rPr sz="1800" b="0" i="0">
+              <a:rPr sz="1600" b="0" i="0">
                 <a:solidFill>
                   <a:srgbClr val="1A1D24"/>
                 </a:solidFill>
                 <a:latin typeface="Segoe UI"/>
               </a:rPr>
-              <a:t>64 origin squares × 73 move types: 56 queen-style, 8 knight, 9 underpromotions.</a:t>
+              <a:t>64 origin squares × 73 move types: 56 queen-style, 8 knight, 9 underpromotions. Every legal move maps to exactly one index — round-trip tested, 0 collisions.</a:t>
             </a:r>
           </a:p>
           <a:p>
@@ -4324,13 +3817,51 @@
               </a:spcAft>
             </a:pPr>
             <a:r>
-              <a:rPr sz="1800" b="0" i="0">
+              <a:rPr sz="1600" b="1" i="0">
+                <a:solidFill>
+                  <a:srgbClr val="1F4E9C"/>
+                </a:solidFill>
+                <a:latin typeface="Segoe UI"/>
+              </a:rPr>
+              <a:t>The network</a:t>
+            </a:r>
+          </a:p>
+          <a:p>
+            <a:pPr algn="l">
+              <a:spcBef>
+                <a:spcPts val="0"/>
+              </a:spcBef>
+              <a:spcAft>
+                <a:spcPts val="1300"/>
+              </a:spcAft>
+            </a:pPr>
+            <a:r>
+              <a:rPr sz="1600" b="0" i="0">
                 <a:solidFill>
                   <a:srgbClr val="1A1D24"/>
                 </a:solidFill>
                 <a:latin typeface="Segoe UI"/>
               </a:rPr>
-              <a:t>Every legal chess move maps to exactly one index. Verified by a round-trip test over thousands of positions: 0 collisions.</a:t>
+              <a:t>3×3 conv 18→64, ten residual blocks with batch norm, then two heads: policy → 4,672 logits, value → one scalar in [−1, 1].</a:t>
+            </a:r>
+          </a:p>
+          <a:p>
+            <a:pPr algn="l">
+              <a:spcBef>
+                <a:spcPts val="0"/>
+              </a:spcBef>
+              <a:spcAft>
+                <a:spcPts val="1300"/>
+              </a:spcAft>
+            </a:pPr>
+            <a:r>
+              <a:rPr sz="1600" b="0" i="0">
+                <a:solidFill>
+                  <a:srgbClr val="1A1D24"/>
+                </a:solidFill>
+                <a:latin typeface="Segoe UI"/>
+              </a:rPr>
+              <a:t>Both heads share the trunk, so one representation must serve two tasks.</a:t>
             </a:r>
           </a:p>
         </p:txBody>
@@ -4343,7 +3874,7 @@
         </p:nvSpPr>
         <p:spPr>
           <a:xfrm>
-            <a:off x="8046720" y="2194560"/>
+            <a:off x="8046720" y="2011680"/>
             <a:ext cx="3383280" cy="1508760"/>
           </a:xfrm>
           <a:prstGeom prst="rect">
@@ -4387,7 +3918,7 @@
         </p:nvSpPr>
         <p:spPr>
           <a:xfrm>
-            <a:off x="8046720" y="2359152"/>
+            <a:off x="8046720" y="2176272"/>
             <a:ext cx="3383280" cy="1188720"/>
           </a:xfrm>
           <a:prstGeom prst="rect">
@@ -4410,7 +3941,7 @@
               </a:spcAft>
             </a:pPr>
             <a:r>
-              <a:rPr sz="3600" b="1" i="0">
+              <a:rPr sz="3200" b="1" i="0">
                 <a:solidFill>
                   <a:srgbClr val="1F4E9C"/>
                 </a:solidFill>
@@ -4448,7 +3979,7 @@
         </p:nvSpPr>
         <p:spPr>
           <a:xfrm>
-            <a:off x="8046720" y="3886200"/>
+            <a:off x="8046720" y="3520440"/>
             <a:ext cx="3383280" cy="1508760"/>
           </a:xfrm>
           <a:prstGeom prst="rect">
@@ -4492,7 +4023,7 @@
         </p:nvSpPr>
         <p:spPr>
           <a:xfrm>
-            <a:off x="8046720" y="4050792"/>
+            <a:off x="8046720" y="3685032"/>
             <a:ext cx="3383280" cy="1188720"/>
           </a:xfrm>
           <a:prstGeom prst="rect">
@@ -4515,7 +4046,7 @@
               </a:spcAft>
             </a:pPr>
             <a:r>
-              <a:rPr sz="3600" b="1" i="0">
+              <a:rPr sz="3200" b="1" i="0">
                 <a:solidFill>
                   <a:srgbClr val="1F4E9C"/>
                 </a:solidFill>
@@ -4547,7 +4078,112 @@
       </p:sp>
       <p:sp>
         <p:nvSpPr>
-          <p:cNvPr id="9" name="TextBox 8"/>
+          <p:cNvPr id="9" name="Rectangle 8"/>
+          <p:cNvSpPr/>
+          <p:nvPr/>
+        </p:nvSpPr>
+        <p:spPr>
+          <a:xfrm>
+            <a:off x="8046720" y="5029200"/>
+            <a:ext cx="3383280" cy="1508760"/>
+          </a:xfrm>
+          <a:prstGeom prst="rect">
+            <a:avLst/>
+          </a:prstGeom>
+          <a:solidFill>
+            <a:srgbClr val="F2F5F9"/>
+          </a:solidFill>
+          <a:ln>
+            <a:noFill/>
+          </a:ln>
+          <a:effectLst/>
+        </p:spPr>
+        <p:style>
+          <a:lnRef idx="1">
+            <a:schemeClr val="accent1"/>
+          </a:lnRef>
+          <a:fillRef idx="3">
+            <a:schemeClr val="accent1"/>
+          </a:fillRef>
+          <a:effectRef idx="2">
+            <a:schemeClr val="accent1"/>
+          </a:effectRef>
+          <a:fontRef idx="minor">
+            <a:schemeClr val="lt1"/>
+          </a:fontRef>
+        </p:style>
+        <p:txBody>
+          <a:bodyPr rtlCol="0" anchor="ctr"/>
+          <a:lstStyle/>
+          <a:p>
+            <a:pPr algn="ctr"/>
+          </a:p>
+        </p:txBody>
+      </p:sp>
+      <p:sp>
+        <p:nvSpPr>
+          <p:cNvPr id="10" name="TextBox 9"/>
+          <p:cNvSpPr txBox="1"/>
+          <p:nvPr/>
+        </p:nvSpPr>
+        <p:spPr>
+          <a:xfrm>
+            <a:off x="8046720" y="5193792"/>
+            <a:ext cx="3383280" cy="1188720"/>
+          </a:xfrm>
+          <a:prstGeom prst="rect">
+            <a:avLst/>
+          </a:prstGeom>
+          <a:noFill/>
+        </p:spPr>
+        <p:txBody>
+          <a:bodyPr wrap="square">
+            <a:spAutoFit/>
+          </a:bodyPr>
+          <a:lstStyle/>
+          <a:p>
+            <a:pPr algn="ctr">
+              <a:spcBef>
+                <a:spcPts val="0"/>
+              </a:spcBef>
+              <a:spcAft>
+                <a:spcPts val="200"/>
+              </a:spcAft>
+            </a:pPr>
+            <a:r>
+              <a:rPr sz="3200" b="1" i="0">
+                <a:solidFill>
+                  <a:srgbClr val="1A7F4B"/>
+                </a:solidFill>
+                <a:latin typeface="Segoe UI"/>
+              </a:rPr>
+              <a:t>760,717</a:t>
+            </a:r>
+          </a:p>
+          <a:p>
+            <a:pPr algn="ctr">
+              <a:spcBef>
+                <a:spcPts val="0"/>
+              </a:spcBef>
+              <a:spcAft>
+                <a:spcPts val="0"/>
+              </a:spcAft>
+            </a:pPr>
+            <a:r>
+              <a:rPr sz="1300" b="0" i="0">
+                <a:solidFill>
+                  <a:srgbClr val="5A6472"/>
+                </a:solidFill>
+                <a:latin typeface="Segoe UI"/>
+              </a:rPr>
+              <a:t>parameters</a:t>
+            </a:r>
+          </a:p>
+        </p:txBody>
+      </p:sp>
+      <p:sp>
+        <p:nvSpPr>
+          <p:cNvPr id="11" name="TextBox 10"/>
           <p:cNvSpPr txBox="1"/>
           <p:nvPr/>
         </p:nvSpPr>
@@ -4650,7 +4286,7 @@
                 </a:solidFill>
                 <a:latin typeface="Segoe UI"/>
               </a:rPr>
-              <a:t>THE MODEL</a:t>
+              <a:t>STAGE 1 · SUPERVISED</a:t>
             </a:r>
           </a:p>
           <a:p>
@@ -4665,11 +4301,11 @@
             <a:r>
               <a:rPr sz="3300" b="1" i="0">
                 <a:solidFill>
-                  <a:srgbClr val="1A1D24"/>
-                </a:solidFill>
-                <a:latin typeface="Segoe UI"/>
-              </a:rPr>
-              <a:t>A residual policy–value network</a:t>
+                  <a:srgbClr val="1A7F4B"/>
+                </a:solidFill>
+                <a:latin typeface="Segoe UI"/>
+              </a:rPr>
+              <a:t>Learning from 677k human positions</a:t>
             </a:r>
           </a:p>
         </p:txBody>
@@ -4718,16 +4354,40 @@
           </a:p>
         </p:txBody>
       </p:sp>
-      <p:sp>
-        <p:nvSpPr>
-          <p:cNvPr id="4" name="TextBox 3"/>
+      <p:pic>
+        <p:nvPicPr>
+          <p:cNvPr id="4" name="Picture 3" descr="pretrain_loss.png"/>
+          <p:cNvPicPr>
+            <a:picLocks noChangeAspect="1"/>
+          </p:cNvPicPr>
+          <p:nvPr/>
+        </p:nvPicPr>
+        <p:blipFill>
+          <a:blip r:embed="rId2"/>
+          <a:stretch>
+            <a:fillRect/>
+          </a:stretch>
+        </p:blipFill>
+        <p:spPr>
+          <a:xfrm>
+            <a:off x="685800" y="2011680"/>
+            <a:ext cx="5486400" cy="4291509"/>
+          </a:xfrm>
+          <a:prstGeom prst="rect">
+            <a:avLst/>
+          </a:prstGeom>
+        </p:spPr>
+      </p:pic>
+      <p:sp>
+        <p:nvSpPr>
+          <p:cNvPr id="5" name="TextBox 4"/>
           <p:cNvSpPr txBox="1"/>
           <p:nvPr/>
         </p:nvSpPr>
         <p:spPr>
           <a:xfrm>
-            <a:off x="685800" y="1965960"/>
-            <a:ext cx="6675120" cy="4343400"/>
+            <a:off x="6492240" y="2103120"/>
+            <a:ext cx="5029200" cy="4206240"/>
           </a:xfrm>
           <a:prstGeom prst="rect">
             <a:avLst/>
@@ -4749,13 +4409,13 @@
               </a:spcAft>
             </a:pPr>
             <a:r>
-              <a:rPr sz="1800" b="0" i="0">
+              <a:rPr sz="1600" b="1" i="0">
                 <a:solidFill>
                   <a:srgbClr val="1A1D24"/>
                 </a:solidFill>
                 <a:latin typeface="Segoe UI"/>
               </a:rPr>
-              <a:t>3×3 convolution: 18 planes → 64 channels</a:t>
+              <a:t>Lichess database, both players rated 1750+</a:t>
             </a:r>
           </a:p>
           <a:p>
@@ -4768,13 +4428,13 @@
               </a:spcAft>
             </a:pPr>
             <a:r>
-              <a:rPr sz="1800" b="0" i="0">
+              <a:rPr sz="1600" b="0" i="0">
                 <a:solidFill>
                   <a:srgbClr val="1A1D24"/>
                 </a:solidFill>
                 <a:latin typeface="Segoe UI"/>
               </a:rPr>
-              <a:t>10 residual blocks, 64 filters, batch normalisation</a:t>
+              <a:t>The Elo filter keeps only ~12% of games — imitate competent play, not average play.</a:t>
             </a:r>
           </a:p>
           <a:p>
@@ -4787,13 +4447,13 @@
               </a:spcAft>
             </a:pPr>
             <a:r>
-              <a:rPr sz="1800" b="1" i="0">
-                <a:solidFill>
-                  <a:srgbClr val="1F4E9C"/>
-                </a:solidFill>
-                <a:latin typeface="Segoe UI"/>
-              </a:rPr>
-              <a:t>Policy head → 4,672 logits   ·   Value head → one scalar</a:t>
+              <a:rPr sz="1600" b="1" i="0">
+                <a:solidFill>
+                  <a:srgbClr val="1A7F4B"/>
+                </a:solidFill>
+                <a:latin typeface="Segoe UI"/>
+              </a:rPr>
+              <a:t>Policy cross-entropy 3.90 → 2.06</a:t>
             </a:r>
           </a:p>
           <a:p>
@@ -4806,13 +4466,13 @@
               </a:spcAft>
             </a:pPr>
             <a:r>
-              <a:rPr sz="1800" b="0" i="0">
+              <a:rPr sz="1600" b="0" i="0">
                 <a:solidFill>
                   <a:srgbClr val="1A1D24"/>
                 </a:solidFill>
                 <a:latin typeface="Segoe UI"/>
               </a:rPr>
-              <a:t>Both heads share the trunk — the representation must serve two tasks at once.</a:t>
+              <a:t>≈ 13% probability on the exact move a strong human chose, out of 4,672 options.</a:t>
             </a:r>
           </a:p>
           <a:p>
@@ -4825,265 +4485,13 @@
               </a:spcAft>
             </a:pPr>
             <a:r>
-              <a:rPr sz="1800" b="0" i="0">
-                <a:solidFill>
-                  <a:srgbClr val="1A1D24"/>
-                </a:solidFill>
-                <a:latin typeface="Segoe UI"/>
-              </a:rPr>
-              <a:t>Trained with the AlphaZero loss: cross-entropy on the search distribution, plus MSE on the game result.</a:t>
-            </a:r>
-          </a:p>
-        </p:txBody>
-      </p:sp>
-      <p:sp>
-        <p:nvSpPr>
-          <p:cNvPr id="5" name="Rectangle 4"/>
-          <p:cNvSpPr/>
-          <p:nvPr/>
-        </p:nvSpPr>
-        <p:spPr>
-          <a:xfrm>
-            <a:off x="7955279" y="2194560"/>
-            <a:ext cx="3474720" cy="1508760"/>
-          </a:xfrm>
-          <a:prstGeom prst="rect">
-            <a:avLst/>
-          </a:prstGeom>
-          <a:solidFill>
-            <a:srgbClr val="F2F5F9"/>
-          </a:solidFill>
-          <a:ln>
-            <a:noFill/>
-          </a:ln>
-          <a:effectLst/>
-        </p:spPr>
-        <p:style>
-          <a:lnRef idx="1">
-            <a:schemeClr val="accent1"/>
-          </a:lnRef>
-          <a:fillRef idx="3">
-            <a:schemeClr val="accent1"/>
-          </a:fillRef>
-          <a:effectRef idx="2">
-            <a:schemeClr val="accent1"/>
-          </a:effectRef>
-          <a:fontRef idx="minor">
-            <a:schemeClr val="lt1"/>
-          </a:fontRef>
-        </p:style>
-        <p:txBody>
-          <a:bodyPr rtlCol="0" anchor="ctr"/>
-          <a:lstStyle/>
-          <a:p>
-            <a:pPr algn="ctr"/>
-          </a:p>
-        </p:txBody>
-      </p:sp>
-      <p:sp>
-        <p:nvSpPr>
-          <p:cNvPr id="6" name="TextBox 5"/>
-          <p:cNvSpPr txBox="1"/>
-          <p:nvPr/>
-        </p:nvSpPr>
-        <p:spPr>
-          <a:xfrm>
-            <a:off x="7955279" y="2359152"/>
-            <a:ext cx="3474720" cy="1188720"/>
-          </a:xfrm>
-          <a:prstGeom prst="rect">
-            <a:avLst/>
-          </a:prstGeom>
-          <a:noFill/>
-        </p:spPr>
-        <p:txBody>
-          <a:bodyPr wrap="square">
-            <a:spAutoFit/>
-          </a:bodyPr>
-          <a:lstStyle/>
-          <a:p>
-            <a:pPr algn="ctr">
-              <a:spcBef>
-                <a:spcPts val="0"/>
-              </a:spcBef>
-              <a:spcAft>
-                <a:spcPts val="200"/>
-              </a:spcAft>
-            </a:pPr>
-            <a:r>
-              <a:rPr sz="4400" b="1" i="0">
-                <a:solidFill>
-                  <a:srgbClr val="B87A14"/>
-                </a:solidFill>
-                <a:latin typeface="Segoe UI"/>
-              </a:rPr>
-              <a:t>~1000×</a:t>
-            </a:r>
-          </a:p>
-          <a:p>
-            <a:pPr algn="ctr">
-              <a:spcBef>
-                <a:spcPts val="0"/>
-              </a:spcBef>
-              <a:spcAft>
-                <a:spcPts val="0"/>
-              </a:spcAft>
-            </a:pPr>
-            <a:r>
-              <a:rPr sz="1300" b="0" i="0">
-                <a:solidFill>
-                  <a:srgbClr val="5A6472"/>
-                </a:solidFill>
-                <a:latin typeface="Segoe UI"/>
-              </a:rPr>
-              <a:t>smaller than AlphaZero</a:t>
-            </a:r>
-          </a:p>
-        </p:txBody>
-      </p:sp>
-      <p:sp>
-        <p:nvSpPr>
-          <p:cNvPr id="7" name="Rectangle 6"/>
-          <p:cNvSpPr/>
-          <p:nvPr/>
-        </p:nvSpPr>
-        <p:spPr>
-          <a:xfrm>
-            <a:off x="7955279" y="3886200"/>
-            <a:ext cx="3474720" cy="1508760"/>
-          </a:xfrm>
-          <a:prstGeom prst="rect">
-            <a:avLst/>
-          </a:prstGeom>
-          <a:solidFill>
-            <a:srgbClr val="F2F5F9"/>
-          </a:solidFill>
-          <a:ln>
-            <a:noFill/>
-          </a:ln>
-          <a:effectLst/>
-        </p:spPr>
-        <p:style>
-          <a:lnRef idx="1">
-            <a:schemeClr val="accent1"/>
-          </a:lnRef>
-          <a:fillRef idx="3">
-            <a:schemeClr val="accent1"/>
-          </a:fillRef>
-          <a:effectRef idx="2">
-            <a:schemeClr val="accent1"/>
-          </a:effectRef>
-          <a:fontRef idx="minor">
-            <a:schemeClr val="lt1"/>
-          </a:fontRef>
-        </p:style>
-        <p:txBody>
-          <a:bodyPr rtlCol="0" anchor="ctr"/>
-          <a:lstStyle/>
-          <a:p>
-            <a:pPr algn="ctr"/>
-          </a:p>
-        </p:txBody>
-      </p:sp>
-      <p:sp>
-        <p:nvSpPr>
-          <p:cNvPr id="8" name="TextBox 7"/>
-          <p:cNvSpPr txBox="1"/>
-          <p:nvPr/>
-        </p:nvSpPr>
-        <p:spPr>
-          <a:xfrm>
-            <a:off x="7955279" y="4050792"/>
-            <a:ext cx="3474720" cy="1188720"/>
-          </a:xfrm>
-          <a:prstGeom prst="rect">
-            <a:avLst/>
-          </a:prstGeom>
-          <a:noFill/>
-        </p:spPr>
-        <p:txBody>
-          <a:bodyPr wrap="square">
-            <a:spAutoFit/>
-          </a:bodyPr>
-          <a:lstStyle/>
-          <a:p>
-            <a:pPr algn="ctr">
-              <a:spcBef>
-                <a:spcPts val="0"/>
-              </a:spcBef>
-              <a:spcAft>
-                <a:spcPts val="200"/>
-              </a:spcAft>
-            </a:pPr>
-            <a:r>
-              <a:rPr sz="2600" b="1" i="0">
-                <a:solidFill>
-                  <a:srgbClr val="5A6472"/>
-                </a:solidFill>
-                <a:latin typeface="Segoe UI"/>
-              </a:rPr>
-              <a:t>6 CPU + 1 GPU</a:t>
-            </a:r>
-          </a:p>
-          <a:p>
-            <a:pPr algn="ctr">
-              <a:spcBef>
-                <a:spcPts val="0"/>
-              </a:spcBef>
-              <a:spcAft>
-                <a:spcPts val="0"/>
-              </a:spcAft>
-            </a:pPr>
-            <a:r>
-              <a:rPr sz="1300" b="0" i="0">
-                <a:solidFill>
-                  <a:srgbClr val="5A6472"/>
-                </a:solidFill>
-                <a:latin typeface="Segoe UI"/>
-              </a:rPr>
-              <a:t>self-play on cores, training on GPU</a:t>
-            </a:r>
-          </a:p>
-        </p:txBody>
-      </p:sp>
-      <p:sp>
-        <p:nvSpPr>
-          <p:cNvPr id="9" name="TextBox 8"/>
-          <p:cNvSpPr txBox="1"/>
-          <p:nvPr/>
-        </p:nvSpPr>
-        <p:spPr>
-          <a:xfrm>
-            <a:off x="685800" y="5943600"/>
-            <a:ext cx="10820095" cy="502920"/>
-          </a:xfrm>
-          <a:prstGeom prst="rect">
-            <a:avLst/>
-          </a:prstGeom>
-          <a:noFill/>
-        </p:spPr>
-        <p:txBody>
-          <a:bodyPr wrap="square">
-            <a:spAutoFit/>
-          </a:bodyPr>
-          <a:lstStyle/>
-          <a:p>
-            <a:pPr algn="l">
-              <a:spcBef>
-                <a:spcPts val="0"/>
-              </a:spcBef>
-              <a:spcAft>
-                <a:spcPts val="600"/>
-              </a:spcAft>
-            </a:pPr>
-            <a:r>
-              <a:rPr sz="1500" b="0" i="1">
-                <a:solidFill>
-                  <a:srgbClr val="5A6472"/>
-                </a:solidFill>
-                <a:latin typeface="Segoe UI"/>
-              </a:rPr>
-              <a:t>Self-play is CPU-bound; the GPU only does batched gradient steps.</a:t>
+              <a:rPr sz="1600" b="1" i="0">
+                <a:solidFill>
+                  <a:srgbClr val="1A7F4B"/>
+                </a:solidFill>
+                <a:latin typeface="Segoe UI"/>
+              </a:rPr>
+              <a:t>It plays real chess: e4/d4 openings, wins a hanging queen, finds mate in one. 85% vs random.</a:t>
             </a:r>
           </a:p>
         </p:txBody>
@@ -5151,7 +4559,7 @@
                 </a:solidFill>
                 <a:latin typeface="Segoe UI"/>
               </a:rPr>
-              <a:t>STAGE 1 · SUPERVISED</a:t>
+              <a:t>STAGE 2 · SELF-PLAY</a:t>
             </a:r>
           </a:p>
           <a:p>
@@ -5166,11 +4574,11 @@
             <a:r>
               <a:rPr sz="3300" b="1" i="0">
                 <a:solidFill>
-                  <a:srgbClr val="1A7F4B"/>
-                </a:solidFill>
-                <a:latin typeface="Segoe UI"/>
-              </a:rPr>
-              <a:t>Learning from 677k human positions</a:t>
+                  <a:srgbClr val="1A1D24"/>
+                </a:solidFill>
+                <a:latin typeface="Segoe UI"/>
+              </a:rPr>
+              <a:t>300 iterations. The loss fell the whole way.</a:t>
             </a:r>
           </a:p>
         </p:txBody>
@@ -5221,7 +4629,7 @@
       </p:sp>
       <p:pic>
         <p:nvPicPr>
-          <p:cNvPr id="4" name="Picture 3" descr="pretrain_loss.png"/>
+          <p:cNvPr id="4" name="Picture 3" descr="v5_regression.png"/>
           <p:cNvPicPr>
             <a:picLocks noChangeAspect="1"/>
           </p:cNvPicPr>
@@ -5236,7 +4644,7 @@
         <p:spPr>
           <a:xfrm>
             <a:off x="685800" y="2011680"/>
-            <a:ext cx="5486400" cy="4291509"/>
+            <a:ext cx="5486400" cy="3652825"/>
           </a:xfrm>
           <a:prstGeom prst="rect">
             <a:avLst/>
@@ -5274,13 +4682,13 @@
               </a:spcAft>
             </a:pPr>
             <a:r>
-              <a:rPr sz="1600" b="1" i="0">
+              <a:rPr sz="1700" b="1" i="0">
                 <a:solidFill>
                   <a:srgbClr val="1A1D24"/>
                 </a:solidFill>
                 <a:latin typeface="Segoe UI"/>
               </a:rPr>
-              <a:t>Lichess database, both players rated 1750+</a:t>
+              <a:t>Training loss: 2.36 → 1.85</a:t>
             </a:r>
           </a:p>
           <a:p>
@@ -5293,13 +4701,13 @@
               </a:spcAft>
             </a:pPr>
             <a:r>
-              <a:rPr sz="1600" b="0" i="0">
+              <a:rPr sz="1700" b="0" i="0">
                 <a:solidFill>
                   <a:srgbClr val="1A1D24"/>
                 </a:solidFill>
                 <a:latin typeface="Segoe UI"/>
               </a:rPr>
-              <a:t>The Elo filter keeps only ~12% of games — imitate competent play, not average play.</a:t>
+              <a:t>Monotonic. Textbook. Exactly what you hope to see.</a:t>
             </a:r>
           </a:p>
           <a:p>
@@ -5312,13 +4720,13 @@
               </a:spcAft>
             </a:pPr>
             <a:r>
-              <a:rPr sz="1600" b="1" i="0">
-                <a:solidFill>
-                  <a:srgbClr val="1A7F4B"/>
-                </a:solidFill>
-                <a:latin typeface="Segoe UI"/>
-              </a:rPr>
-              <a:t>Policy cross-entropy 3.90 → 2.06</a:t>
+              <a:rPr sz="1700" b="1" i="0">
+                <a:solidFill>
+                  <a:srgbClr val="5A6472"/>
+                </a:solidFill>
+                <a:latin typeface="Segoe UI"/>
+              </a:rPr>
+              <a:t>Reported evaluation score: 50%</a:t>
             </a:r>
           </a:p>
           <a:p>
@@ -5331,13 +4739,13 @@
               </a:spcAft>
             </a:pPr>
             <a:r>
-              <a:rPr sz="1600" b="0" i="0">
+              <a:rPr sz="1700" b="0" i="0">
                 <a:solidFill>
                   <a:srgbClr val="1A1D24"/>
                 </a:solidFill>
                 <a:latin typeface="Segoe UI"/>
               </a:rPr>
-              <a:t>≈ 13% probability on the exact move a strong human chose, out of 4,672 options.</a:t>
+              <a:t>For 159 consecutive measurements across two multi-hour runs.</a:t>
             </a:r>
           </a:p>
           <a:p>
@@ -5350,13 +4758,32 @@
               </a:spcAft>
             </a:pPr>
             <a:r>
-              <a:rPr sz="1600" b="1" i="0">
-                <a:solidFill>
-                  <a:srgbClr val="1A7F4B"/>
-                </a:solidFill>
-                <a:latin typeface="Segoe UI"/>
-              </a:rPr>
-              <a:t>It plays real chess: e4/d4 openings, wins a hanging queen, finds mate in one. 85% vs random.</a:t>
+              <a:rPr sz="1700" b="1" i="0">
+                <a:solidFill>
+                  <a:srgbClr val="B3352C"/>
+                </a:solidFill>
+                <a:latin typeface="Segoe UI"/>
+              </a:rPr>
+              <a:t>I read that as “evenly matched.”</a:t>
+            </a:r>
+          </a:p>
+          <a:p>
+            <a:pPr algn="l">
+              <a:spcBef>
+                <a:spcPts val="0"/>
+              </a:spcBef>
+              <a:spcAft>
+                <a:spcPts val="1300"/>
+              </a:spcAft>
+            </a:pPr>
+            <a:r>
+              <a:rPr sz="1700" b="0" i="0">
+                <a:solidFill>
+                  <a:srgbClr val="1A1D24"/>
+                </a:solidFill>
+                <a:latin typeface="Segoe UI"/>
+              </a:rPr>
+              <a:t>It was not. It was a metric that could not return anything else.</a:t>
             </a:r>
           </a:p>
         </p:txBody>
@@ -5424,7 +4851,7 @@
                 </a:solidFill>
                 <a:latin typeface="Segoe UI"/>
               </a:rPr>
-              <a:t>STAGE 2 · SELF-PLAY</a:t>
+              <a:t>THE BUG</a:t>
             </a:r>
           </a:p>
           <a:p>
@@ -5439,11 +4866,11 @@
             <a:r>
               <a:rPr sz="3300" b="1" i="0">
                 <a:solidFill>
-                  <a:srgbClr val="1A1D24"/>
-                </a:solidFill>
-                <a:latin typeface="Segoe UI"/>
-              </a:rPr>
-              <a:t>300 iterations. The loss fell the whole way.</a:t>
+                  <a:srgbClr val="B3352C"/>
+                </a:solidFill>
+                <a:latin typeface="Segoe UI"/>
+              </a:rPr>
+              <a:t>The evaluation was measuring nothing</a:t>
             </a:r>
           </a:p>
         </p:txBody>
@@ -5492,40 +4919,16 @@
           </a:p>
         </p:txBody>
       </p:sp>
-      <p:pic>
-        <p:nvPicPr>
-          <p:cNvPr id="4" name="Picture 3" descr="v5_regression.png"/>
-          <p:cNvPicPr>
-            <a:picLocks noChangeAspect="1"/>
-          </p:cNvPicPr>
-          <p:nvPr/>
-        </p:nvPicPr>
-        <p:blipFill>
-          <a:blip r:embed="rId2"/>
-          <a:stretch>
-            <a:fillRect/>
-          </a:stretch>
-        </p:blipFill>
-        <p:spPr>
-          <a:xfrm>
-            <a:off x="685800" y="2011680"/>
-            <a:ext cx="5486400" cy="3652825"/>
-          </a:xfrm>
-          <a:prstGeom prst="rect">
-            <a:avLst/>
-          </a:prstGeom>
-        </p:spPr>
-      </p:pic>
-      <p:sp>
-        <p:nvSpPr>
-          <p:cNvPr id="5" name="TextBox 4"/>
+      <p:sp>
+        <p:nvSpPr>
+          <p:cNvPr id="4" name="TextBox 3"/>
           <p:cNvSpPr txBox="1"/>
           <p:nvPr/>
         </p:nvSpPr>
         <p:spPr>
           <a:xfrm>
-            <a:off x="6492240" y="2103120"/>
-            <a:ext cx="5029200" cy="4206240"/>
+            <a:off x="685800" y="1920240"/>
+            <a:ext cx="5989320" cy="4389120"/>
           </a:xfrm>
           <a:prstGeom prst="rect">
             <a:avLst/>
@@ -5547,13 +4950,13 @@
               </a:spcAft>
             </a:pPr>
             <a:r>
-              <a:rPr sz="1700" b="1" i="0">
+              <a:rPr sz="1800" b="0" i="0">
                 <a:solidFill>
                   <a:srgbClr val="1A1D24"/>
                 </a:solidFill>
                 <a:latin typeface="Segoe UI"/>
               </a:rPr>
-              <a:t>Training loss: 2.36 → 1.85</a:t>
+              <a:t>The network alternated colours — half its games as white, half as black.</a:t>
             </a:r>
           </a:p>
           <a:p>
@@ -5566,13 +4969,32 @@
               </a:spcAft>
             </a:pPr>
             <a:r>
-              <a:rPr sz="1700" b="0" i="0">
+              <a:rPr sz="1800" b="1" i="0">
+                <a:solidFill>
+                  <a:srgbClr val="B3352C"/>
+                </a:solidFill>
+                <a:latin typeface="Segoe UI"/>
+              </a:rPr>
+              <a:t>The score counted white’s wins.</a:t>
+            </a:r>
+          </a:p>
+          <a:p>
+            <a:pPr algn="l">
+              <a:spcBef>
+                <a:spcPts val="0"/>
+              </a:spcBef>
+              <a:spcAft>
+                <a:spcPts val="1300"/>
+              </a:spcAft>
+            </a:pPr>
+            <a:r>
+              <a:rPr sz="1800" b="0" i="0">
                 <a:solidFill>
                   <a:srgbClr val="1A1D24"/>
                 </a:solidFill>
                 <a:latin typeface="Segoe UI"/>
               </a:rPr>
-              <a:t>Monotonic. Textbook. Exactly what you hope to see.</a:t>
+              <a:t>So every game the network won as black was recorded as a loss.</a:t>
             </a:r>
           </a:p>
           <a:p>
@@ -5585,70 +5007,364 @@
               </a:spcAft>
             </a:pPr>
             <a:r>
-              <a:rPr sz="1700" b="1" i="0">
+              <a:rPr sz="1800" b="0" i="0">
+                <a:solidFill>
+                  <a:srgbClr val="1A1D24"/>
+                </a:solidFill>
+                <a:latin typeface="Segoe UI"/>
+              </a:rPr>
+              <a:t>With two deterministic players and no opening randomisation, all five games per colour are identical — the tally can only be symmetric.</a:t>
+            </a:r>
+          </a:p>
+        </p:txBody>
+      </p:sp>
+      <p:sp>
+        <p:nvSpPr>
+          <p:cNvPr id="5" name="Rectangle 4"/>
+          <p:cNvSpPr/>
+          <p:nvPr/>
+        </p:nvSpPr>
+        <p:spPr>
+          <a:xfrm>
+            <a:off x="6949440" y="2194560"/>
+            <a:ext cx="4572000" cy="1097280"/>
+          </a:xfrm>
+          <a:prstGeom prst="rect">
+            <a:avLst/>
+          </a:prstGeom>
+          <a:solidFill>
+            <a:srgbClr val="F7F7F4"/>
+          </a:solidFill>
+          <a:ln>
+            <a:noFill/>
+          </a:ln>
+          <a:effectLst/>
+        </p:spPr>
+        <p:style>
+          <a:lnRef idx="1">
+            <a:schemeClr val="accent1"/>
+          </a:lnRef>
+          <a:fillRef idx="3">
+            <a:schemeClr val="accent1"/>
+          </a:fillRef>
+          <a:effectRef idx="2">
+            <a:schemeClr val="accent1"/>
+          </a:effectRef>
+          <a:fontRef idx="minor">
+            <a:schemeClr val="lt1"/>
+          </a:fontRef>
+        </p:style>
+        <p:txBody>
+          <a:bodyPr rtlCol="0" anchor="ctr"/>
+          <a:lstStyle/>
+          <a:p>
+            <a:pPr algn="ctr"/>
+          </a:p>
+        </p:txBody>
+      </p:sp>
+      <p:sp>
+        <p:nvSpPr>
+          <p:cNvPr id="6" name="TextBox 5"/>
+          <p:cNvSpPr txBox="1"/>
+          <p:nvPr/>
+        </p:nvSpPr>
+        <p:spPr>
+          <a:xfrm>
+            <a:off x="7150608" y="2340864"/>
+            <a:ext cx="4206240" cy="1097280"/>
+          </a:xfrm>
+          <a:prstGeom prst="rect">
+            <a:avLst/>
+          </a:prstGeom>
+          <a:noFill/>
+        </p:spPr>
+        <p:txBody>
+          <a:bodyPr wrap="square">
+            <a:spAutoFit/>
+          </a:bodyPr>
+          <a:lstStyle/>
+          <a:p>
+            <a:pPr>
+              <a:spcAft>
+                <a:spcPts val="500"/>
+              </a:spcAft>
+            </a:pPr>
+            <a:r>
+              <a:rPr sz="1300">
                 <a:solidFill>
                   <a:srgbClr val="5A6472"/>
                 </a:solidFill>
-                <a:latin typeface="Segoe UI"/>
-              </a:rPr>
-              <a:t>Reported evaluation score: 50%</a:t>
-            </a:r>
-          </a:p>
-          <a:p>
-            <a:pPr algn="l">
-              <a:spcBef>
-                <a:spcPts val="0"/>
-              </a:spcBef>
-              <a:spcAft>
-                <a:spcPts val="1300"/>
-              </a:spcAft>
-            </a:pPr>
-            <a:r>
-              <a:rPr sz="1700" b="0" i="0">
-                <a:solidFill>
-                  <a:srgbClr val="1A1D24"/>
-                </a:solidFill>
-                <a:latin typeface="Segoe UI"/>
-              </a:rPr>
-              <a:t>For 159 consecutive measurements across two multi-hour runs.</a:t>
-            </a:r>
-          </a:p>
-          <a:p>
-            <a:pPr algn="l">
-              <a:spcBef>
-                <a:spcPts val="0"/>
-              </a:spcBef>
-              <a:spcAft>
-                <a:spcPts val="1300"/>
-              </a:spcAft>
-            </a:pPr>
-            <a:r>
-              <a:rPr sz="1700" b="1" i="0">
+                <a:latin typeface="Consolas"/>
+              </a:rPr>
+              <a:t>[iter 454] eval: {'1-0': 0, '0-1': 0, '1/2-1/2': 10}  50%</a:t>
+            </a:r>
+          </a:p>
+          <a:p>
+            <a:pPr>
+              <a:spcAft>
+                <a:spcPts val="500"/>
+              </a:spcAft>
+            </a:pPr>
+            <a:r>
+              <a:rPr sz="1300">
+                <a:solidFill>
+                  <a:srgbClr val="5A6472"/>
+                </a:solidFill>
+                <a:latin typeface="Consolas"/>
+              </a:rPr>
+              <a:t>[iter 499] eval: {'1-0': 0, '0-1': 0, '1/2-1/2': 10}  50%</a:t>
+            </a:r>
+          </a:p>
+        </p:txBody>
+      </p:sp>
+      <p:sp>
+        <p:nvSpPr>
+          <p:cNvPr id="7" name="Rectangle 6"/>
+          <p:cNvSpPr/>
+          <p:nvPr/>
+        </p:nvSpPr>
+        <p:spPr>
+          <a:xfrm>
+            <a:off x="6949440" y="3657600"/>
+            <a:ext cx="2148840" cy="1508760"/>
+          </a:xfrm>
+          <a:prstGeom prst="rect">
+            <a:avLst/>
+          </a:prstGeom>
+          <a:solidFill>
+            <a:srgbClr val="F2F5F9"/>
+          </a:solidFill>
+          <a:ln>
+            <a:noFill/>
+          </a:ln>
+          <a:effectLst/>
+        </p:spPr>
+        <p:style>
+          <a:lnRef idx="1">
+            <a:schemeClr val="accent1"/>
+          </a:lnRef>
+          <a:fillRef idx="3">
+            <a:schemeClr val="accent1"/>
+          </a:fillRef>
+          <a:effectRef idx="2">
+            <a:schemeClr val="accent1"/>
+          </a:effectRef>
+          <a:fontRef idx="minor">
+            <a:schemeClr val="lt1"/>
+          </a:fontRef>
+        </p:style>
+        <p:txBody>
+          <a:bodyPr rtlCol="0" anchor="ctr"/>
+          <a:lstStyle/>
+          <a:p>
+            <a:pPr algn="ctr"/>
+          </a:p>
+        </p:txBody>
+      </p:sp>
+      <p:sp>
+        <p:nvSpPr>
+          <p:cNvPr id="8" name="TextBox 7"/>
+          <p:cNvSpPr txBox="1"/>
+          <p:nvPr/>
+        </p:nvSpPr>
+        <p:spPr>
+          <a:xfrm>
+            <a:off x="6949440" y="3822192"/>
+            <a:ext cx="2148840" cy="1188720"/>
+          </a:xfrm>
+          <a:prstGeom prst="rect">
+            <a:avLst/>
+          </a:prstGeom>
+          <a:noFill/>
+        </p:spPr>
+        <p:txBody>
+          <a:bodyPr wrap="square">
+            <a:spAutoFit/>
+          </a:bodyPr>
+          <a:lstStyle/>
+          <a:p>
+            <a:pPr algn="ctr">
+              <a:spcBef>
+                <a:spcPts val="0"/>
+              </a:spcBef>
+              <a:spcAft>
+                <a:spcPts val="200"/>
+              </a:spcAft>
+            </a:pPr>
+            <a:r>
+              <a:rPr sz="4000" b="1" i="0">
                 <a:solidFill>
                   <a:srgbClr val="B3352C"/>
                 </a:solidFill>
                 <a:latin typeface="Segoe UI"/>
               </a:rPr>
-              <a:t>I read that as “evenly matched.”</a:t>
-            </a:r>
-          </a:p>
-          <a:p>
-            <a:pPr algn="l">
-              <a:spcBef>
-                <a:spcPts val="0"/>
-              </a:spcBef>
-              <a:spcAft>
-                <a:spcPts val="1300"/>
-              </a:spcAft>
-            </a:pPr>
-            <a:r>
-              <a:rPr sz="1700" b="0" i="0">
-                <a:solidFill>
-                  <a:srgbClr val="1A1D24"/>
-                </a:solidFill>
-                <a:latin typeface="Segoe UI"/>
-              </a:rPr>
-              <a:t>It was not. It was a metric that could not return anything else.</a:t>
+              <a:t>159</a:t>
+            </a:r>
+          </a:p>
+          <a:p>
+            <a:pPr algn="ctr">
+              <a:spcBef>
+                <a:spcPts val="0"/>
+              </a:spcBef>
+              <a:spcAft>
+                <a:spcPts val="0"/>
+              </a:spcAft>
+            </a:pPr>
+            <a:r>
+              <a:rPr sz="1300" b="0" i="0">
+                <a:solidFill>
+                  <a:srgbClr val="5A6472"/>
+                </a:solidFill>
+                <a:latin typeface="Segoe UI"/>
+              </a:rPr>
+              <a:t>useless data points</a:t>
+            </a:r>
+          </a:p>
+        </p:txBody>
+      </p:sp>
+      <p:sp>
+        <p:nvSpPr>
+          <p:cNvPr id="9" name="Rectangle 8"/>
+          <p:cNvSpPr/>
+          <p:nvPr/>
+        </p:nvSpPr>
+        <p:spPr>
+          <a:xfrm>
+            <a:off x="9372600" y="3657600"/>
+            <a:ext cx="2148840" cy="1508760"/>
+          </a:xfrm>
+          <a:prstGeom prst="rect">
+            <a:avLst/>
+          </a:prstGeom>
+          <a:solidFill>
+            <a:srgbClr val="F2F5F9"/>
+          </a:solidFill>
+          <a:ln>
+            <a:noFill/>
+          </a:ln>
+          <a:effectLst/>
+        </p:spPr>
+        <p:style>
+          <a:lnRef idx="1">
+            <a:schemeClr val="accent1"/>
+          </a:lnRef>
+          <a:fillRef idx="3">
+            <a:schemeClr val="accent1"/>
+          </a:fillRef>
+          <a:effectRef idx="2">
+            <a:schemeClr val="accent1"/>
+          </a:effectRef>
+          <a:fontRef idx="minor">
+            <a:schemeClr val="lt1"/>
+          </a:fontRef>
+        </p:style>
+        <p:txBody>
+          <a:bodyPr rtlCol="0" anchor="ctr"/>
+          <a:lstStyle/>
+          <a:p>
+            <a:pPr algn="ctr"/>
+          </a:p>
+        </p:txBody>
+      </p:sp>
+      <p:sp>
+        <p:nvSpPr>
+          <p:cNvPr id="10" name="TextBox 9"/>
+          <p:cNvSpPr txBox="1"/>
+          <p:nvPr/>
+        </p:nvSpPr>
+        <p:spPr>
+          <a:xfrm>
+            <a:off x="9372600" y="3822192"/>
+            <a:ext cx="2148840" cy="1188720"/>
+          </a:xfrm>
+          <a:prstGeom prst="rect">
+            <a:avLst/>
+          </a:prstGeom>
+          <a:noFill/>
+        </p:spPr>
+        <p:txBody>
+          <a:bodyPr wrap="square">
+            <a:spAutoFit/>
+          </a:bodyPr>
+          <a:lstStyle/>
+          <a:p>
+            <a:pPr algn="ctr">
+              <a:spcBef>
+                <a:spcPts val="0"/>
+              </a:spcBef>
+              <a:spcAft>
+                <a:spcPts val="200"/>
+              </a:spcAft>
+            </a:pPr>
+            <a:r>
+              <a:rPr sz="2600" b="1" i="0">
+                <a:solidFill>
+                  <a:srgbClr val="1A7F4B"/>
+                </a:solidFill>
+                <a:latin typeface="Segoe UI"/>
+              </a:rPr>
+              <a:t>44% → 85%</a:t>
+            </a:r>
+          </a:p>
+          <a:p>
+            <a:pPr algn="ctr">
+              <a:spcBef>
+                <a:spcPts val="0"/>
+              </a:spcBef>
+              <a:spcAft>
+                <a:spcPts val="0"/>
+              </a:spcAft>
+            </a:pPr>
+            <a:r>
+              <a:rPr sz="1300" b="0" i="0">
+                <a:solidFill>
+                  <a:srgbClr val="5A6472"/>
+                </a:solidFill>
+                <a:latin typeface="Segoe UI"/>
+              </a:rPr>
+              <a:t>true score, once fixed</a:t>
+            </a:r>
+          </a:p>
+        </p:txBody>
+      </p:sp>
+      <p:sp>
+        <p:nvSpPr>
+          <p:cNvPr id="11" name="TextBox 10"/>
+          <p:cNvSpPr txBox="1"/>
+          <p:nvPr/>
+        </p:nvSpPr>
+        <p:spPr>
+          <a:xfrm>
+            <a:off x="685800" y="5943600"/>
+            <a:ext cx="10820095" cy="502920"/>
+          </a:xfrm>
+          <a:prstGeom prst="rect">
+            <a:avLst/>
+          </a:prstGeom>
+          <a:noFill/>
+        </p:spPr>
+        <p:txBody>
+          <a:bodyPr wrap="square">
+            <a:spAutoFit/>
+          </a:bodyPr>
+          <a:lstStyle/>
+          <a:p>
+            <a:pPr algn="l">
+              <a:spcBef>
+                <a:spcPts val="0"/>
+              </a:spcBef>
+              <a:spcAft>
+                <a:spcPts val="600"/>
+              </a:spcAft>
+            </a:pPr>
+            <a:r>
+              <a:rPr sz="1500" b="0" i="1">
+                <a:solidFill>
+                  <a:srgbClr val="5A6472"/>
+                </a:solidFill>
+                <a:latin typeface="Segoe UI"/>
+              </a:rPr>
+              <a:t>A metric returning a plausible constant is more dangerous than one that crashes.</a:t>
             </a:r>
           </a:p>
         </p:txBody>
@@ -5716,7 +5432,7 @@
                 </a:solidFill>
                 <a:latin typeface="Segoe UI"/>
               </a:rPr>
-              <a:t>THE BUG</a:t>
+              <a:t>THE REAL RESULT</a:t>
             </a:r>
           </a:p>
           <a:p>
@@ -5735,7 +5451,7 @@
                 </a:solidFill>
                 <a:latin typeface="Segoe UI"/>
               </a:rPr>
-              <a:t>The evaluation was measuring nothing</a:t>
+              <a:t>Self-play made the model worse</a:t>
             </a:r>
           </a:p>
         </p:txBody>
@@ -5786,119 +5502,20 @@
       </p:sp>
       <p:sp>
         <p:nvSpPr>
-          <p:cNvPr id="4" name="TextBox 3"/>
-          <p:cNvSpPr txBox="1"/>
-          <p:nvPr/>
-        </p:nvSpPr>
-        <p:spPr>
-          <a:xfrm>
-            <a:off x="685800" y="1920240"/>
-            <a:ext cx="5989320" cy="4389120"/>
-          </a:xfrm>
-          <a:prstGeom prst="rect">
-            <a:avLst/>
-          </a:prstGeom>
-          <a:noFill/>
-        </p:spPr>
-        <p:txBody>
-          <a:bodyPr wrap="square">
-            <a:spAutoFit/>
-          </a:bodyPr>
-          <a:lstStyle/>
-          <a:p>
-            <a:pPr algn="l">
-              <a:spcBef>
-                <a:spcPts val="0"/>
-              </a:spcBef>
-              <a:spcAft>
-                <a:spcPts val="1300"/>
-              </a:spcAft>
-            </a:pPr>
-            <a:r>
-              <a:rPr sz="1800" b="0" i="0">
-                <a:solidFill>
-                  <a:srgbClr val="1A1D24"/>
-                </a:solidFill>
-                <a:latin typeface="Segoe UI"/>
-              </a:rPr>
-              <a:t>The network alternated colours — half its games as white, half as black.</a:t>
-            </a:r>
-          </a:p>
-          <a:p>
-            <a:pPr algn="l">
-              <a:spcBef>
-                <a:spcPts val="0"/>
-              </a:spcBef>
-              <a:spcAft>
-                <a:spcPts val="1300"/>
-              </a:spcAft>
-            </a:pPr>
-            <a:r>
-              <a:rPr sz="1800" b="1" i="0">
-                <a:solidFill>
-                  <a:srgbClr val="B3352C"/>
-                </a:solidFill>
-                <a:latin typeface="Segoe UI"/>
-              </a:rPr>
-              <a:t>The score counted white’s wins.</a:t>
-            </a:r>
-          </a:p>
-          <a:p>
-            <a:pPr algn="l">
-              <a:spcBef>
-                <a:spcPts val="0"/>
-              </a:spcBef>
-              <a:spcAft>
-                <a:spcPts val="1300"/>
-              </a:spcAft>
-            </a:pPr>
-            <a:r>
-              <a:rPr sz="1800" b="0" i="0">
-                <a:solidFill>
-                  <a:srgbClr val="1A1D24"/>
-                </a:solidFill>
-                <a:latin typeface="Segoe UI"/>
-              </a:rPr>
-              <a:t>So every game the network won as black was recorded as a loss.</a:t>
-            </a:r>
-          </a:p>
-          <a:p>
-            <a:pPr algn="l">
-              <a:spcBef>
-                <a:spcPts val="0"/>
-              </a:spcBef>
-              <a:spcAft>
-                <a:spcPts val="1300"/>
-              </a:spcAft>
-            </a:pPr>
-            <a:r>
-              <a:rPr sz="1800" b="0" i="0">
-                <a:solidFill>
-                  <a:srgbClr val="1A1D24"/>
-                </a:solidFill>
-                <a:latin typeface="Segoe UI"/>
-              </a:rPr>
-              <a:t>With two deterministic players and no opening randomisation, all five games per colour are identical — the tally can only be symmetric.</a:t>
-            </a:r>
-          </a:p>
-        </p:txBody>
-      </p:sp>
-      <p:sp>
-        <p:nvSpPr>
-          <p:cNvPr id="5" name="Rectangle 4"/>
+          <p:cNvPr id="4" name="Rectangle 3"/>
           <p:cNvSpPr/>
           <p:nvPr/>
         </p:nvSpPr>
         <p:spPr>
           <a:xfrm>
-            <a:off x="6949440" y="2194560"/>
-            <a:ext cx="4572000" cy="1097280"/>
+            <a:off x="685800" y="2103120"/>
+            <a:ext cx="10820095" cy="1737360"/>
           </a:xfrm>
           <a:prstGeom prst="rect">
             <a:avLst/>
           </a:prstGeom>
           <a:solidFill>
-            <a:srgbClr val="F7F7F4"/>
+            <a:srgbClr val="FBF0EF"/>
           </a:solidFill>
           <a:ln>
             <a:noFill/>
@@ -5929,14 +5546,14 @@
       </p:sp>
       <p:sp>
         <p:nvSpPr>
-          <p:cNvPr id="6" name="TextBox 5"/>
+          <p:cNvPr id="5" name="TextBox 4"/>
           <p:cNvSpPr txBox="1"/>
           <p:nvPr/>
         </p:nvSpPr>
         <p:spPr>
           <a:xfrm>
-            <a:off x="7150608" y="2340864"/>
-            <a:ext cx="4206240" cy="1097280"/>
+            <a:off x="685800" y="2331720"/>
+            <a:ext cx="10820095" cy="1371600"/>
           </a:xfrm>
           <a:prstGeom prst="rect">
             <a:avLst/>
@@ -5949,93 +5566,55 @@
           </a:bodyPr>
           <a:lstStyle/>
           <a:p>
-            <a:pPr>
-              <a:spcAft>
-                <a:spcPts val="500"/>
-              </a:spcAft>
-            </a:pPr>
-            <a:r>
-              <a:rPr sz="1300">
+            <a:pPr algn="ctr">
+              <a:spcBef>
+                <a:spcPts val="0"/>
+              </a:spcBef>
+              <a:spcAft>
+                <a:spcPts val="600"/>
+              </a:spcAft>
+            </a:pPr>
+            <a:r>
+              <a:rPr sz="4000" b="1" i="0">
+                <a:solidFill>
+                  <a:srgbClr val="B3352C"/>
+                </a:solidFill>
+                <a:latin typeface="Segoe UI"/>
+              </a:rPr>
+              <a:t>v5 final   2.5  —  5.5   its own starting point</a:t>
+            </a:r>
+          </a:p>
+          <a:p>
+            <a:pPr algn="ctr">
+              <a:spcBef>
+                <a:spcPts val="0"/>
+              </a:spcBef>
+              <a:spcAft>
+                <a:spcPts val="0"/>
+              </a:spcAft>
+            </a:pPr>
+            <a:r>
+              <a:rPr sz="1500" b="0" i="0">
                 <a:solidFill>
                   <a:srgbClr val="5A6472"/>
                 </a:solidFill>
-                <a:latin typeface="Consolas"/>
-              </a:rPr>
-              <a:t>[iter 454] eval: {'1-0': 0, '0-1': 0, '1/2-1/2': 10}  50%</a:t>
-            </a:r>
-          </a:p>
-          <a:p>
-            <a:pPr>
-              <a:spcAft>
-                <a:spcPts val="500"/>
-              </a:spcAft>
-            </a:pPr>
-            <a:r>
-              <a:rPr sz="1300">
-                <a:solidFill>
-                  <a:srgbClr val="5A6472"/>
-                </a:solidFill>
-                <a:latin typeface="Consolas"/>
-              </a:rPr>
-              <a:t>[iter 499] eval: {'1-0': 0, '0-1': 0, '1/2-1/2': 10}  50%</a:t>
-            </a:r>
-          </a:p>
-        </p:txBody>
-      </p:sp>
-      <p:sp>
-        <p:nvSpPr>
-          <p:cNvPr id="7" name="Rectangle 6"/>
-          <p:cNvSpPr/>
-          <p:nvPr/>
-        </p:nvSpPr>
-        <p:spPr>
-          <a:xfrm>
-            <a:off x="6949440" y="3657600"/>
-            <a:ext cx="2148840" cy="1508760"/>
-          </a:xfrm>
-          <a:prstGeom prst="rect">
-            <a:avLst/>
-          </a:prstGeom>
-          <a:solidFill>
-            <a:srgbClr val="F2F5F9"/>
-          </a:solidFill>
-          <a:ln>
-            <a:noFill/>
-          </a:ln>
-          <a:effectLst/>
-        </p:spPr>
-        <p:style>
-          <a:lnRef idx="1">
-            <a:schemeClr val="accent1"/>
-          </a:lnRef>
-          <a:fillRef idx="3">
-            <a:schemeClr val="accent1"/>
-          </a:fillRef>
-          <a:effectRef idx="2">
-            <a:schemeClr val="accent1"/>
-          </a:effectRef>
-          <a:fontRef idx="minor">
-            <a:schemeClr val="lt1"/>
-          </a:fontRef>
-        </p:style>
-        <p:txBody>
-          <a:bodyPr rtlCol="0" anchor="ctr"/>
-          <a:lstStyle/>
-          <a:p>
-            <a:pPr algn="ctr"/>
-          </a:p>
-        </p:txBody>
-      </p:sp>
-      <p:sp>
-        <p:nvSpPr>
-          <p:cNvPr id="8" name="TextBox 7"/>
+                <a:latin typeface="Segoe UI"/>
+              </a:rPr>
+              <a:t>8 games, alternating colours, randomised openings</a:t>
+            </a:r>
+          </a:p>
+        </p:txBody>
+      </p:sp>
+      <p:sp>
+        <p:nvSpPr>
+          <p:cNvPr id="6" name="TextBox 5"/>
           <p:cNvSpPr txBox="1"/>
           <p:nvPr/>
         </p:nvSpPr>
         <p:spPr>
           <a:xfrm>
-            <a:off x="6949440" y="3822192"/>
-            <a:ext cx="2148840" cy="1188720"/>
+            <a:off x="685800" y="4114800"/>
+            <a:ext cx="10820095" cy="2194560"/>
           </a:xfrm>
           <a:prstGeom prst="rect">
             <a:avLst/>
@@ -6048,188 +5627,98 @@
           </a:bodyPr>
           <a:lstStyle/>
           <a:p>
-            <a:pPr algn="ctr">
-              <a:spcBef>
-                <a:spcPts val="0"/>
-              </a:spcBef>
-              <a:spcAft>
-                <a:spcPts val="200"/>
-              </a:spcAft>
-            </a:pPr>
-            <a:r>
-              <a:rPr sz="4000" b="1" i="0">
-                <a:solidFill>
-                  <a:srgbClr val="B3352C"/>
-                </a:solidFill>
-                <a:latin typeface="Segoe UI"/>
-              </a:rPr>
-              <a:t>159</a:t>
-            </a:r>
-          </a:p>
-          <a:p>
-            <a:pPr algn="ctr">
-              <a:spcBef>
-                <a:spcPts val="0"/>
-              </a:spcBef>
-              <a:spcAft>
-                <a:spcPts val="0"/>
-              </a:spcAft>
-            </a:pPr>
-            <a:r>
-              <a:rPr sz="1300" b="0" i="0">
-                <a:solidFill>
-                  <a:srgbClr val="5A6472"/>
-                </a:solidFill>
-                <a:latin typeface="Segoe UI"/>
-              </a:rPr>
-              <a:t>useless data points</a:t>
-            </a:r>
-          </a:p>
-        </p:txBody>
-      </p:sp>
-      <p:sp>
-        <p:nvSpPr>
-          <p:cNvPr id="9" name="Rectangle 8"/>
-          <p:cNvSpPr/>
-          <p:nvPr/>
-        </p:nvSpPr>
-        <p:spPr>
-          <a:xfrm>
-            <a:off x="9372600" y="3657600"/>
-            <a:ext cx="2148840" cy="1508760"/>
-          </a:xfrm>
-          <a:prstGeom prst="rect">
-            <a:avLst/>
-          </a:prstGeom>
-          <a:solidFill>
-            <a:srgbClr val="F2F5F9"/>
-          </a:solidFill>
-          <a:ln>
-            <a:noFill/>
-          </a:ln>
-          <a:effectLst/>
-        </p:spPr>
-        <p:style>
-          <a:lnRef idx="1">
-            <a:schemeClr val="accent1"/>
-          </a:lnRef>
-          <a:fillRef idx="3">
-            <a:schemeClr val="accent1"/>
-          </a:fillRef>
-          <a:effectRef idx="2">
-            <a:schemeClr val="accent1"/>
-          </a:effectRef>
-          <a:fontRef idx="minor">
-            <a:schemeClr val="lt1"/>
-          </a:fontRef>
-        </p:style>
-        <p:txBody>
-          <a:bodyPr rtlCol="0" anchor="ctr"/>
-          <a:lstStyle/>
-          <a:p>
-            <a:pPr algn="ctr"/>
-          </a:p>
-        </p:txBody>
-      </p:sp>
-      <p:sp>
-        <p:nvSpPr>
-          <p:cNvPr id="10" name="TextBox 9"/>
-          <p:cNvSpPr txBox="1"/>
-          <p:nvPr/>
-        </p:nvSpPr>
-        <p:spPr>
-          <a:xfrm>
-            <a:off x="9372600" y="3822192"/>
-            <a:ext cx="2148840" cy="1188720"/>
-          </a:xfrm>
-          <a:prstGeom prst="rect">
-            <a:avLst/>
-          </a:prstGeom>
-          <a:noFill/>
-        </p:spPr>
-        <p:txBody>
-          <a:bodyPr wrap="square">
-            <a:spAutoFit/>
-          </a:bodyPr>
-          <a:lstStyle/>
-          <a:p>
-            <a:pPr algn="ctr">
-              <a:spcBef>
-                <a:spcPts val="0"/>
-              </a:spcBef>
-              <a:spcAft>
-                <a:spcPts val="200"/>
-              </a:spcAft>
-            </a:pPr>
-            <a:r>
-              <a:rPr sz="2600" b="1" i="0">
-                <a:solidFill>
-                  <a:srgbClr val="1A7F4B"/>
-                </a:solidFill>
-                <a:latin typeface="Segoe UI"/>
-              </a:rPr>
-              <a:t>44% → 85%</a:t>
-            </a:r>
-          </a:p>
-          <a:p>
-            <a:pPr algn="ctr">
-              <a:spcBef>
-                <a:spcPts val="0"/>
-              </a:spcBef>
-              <a:spcAft>
-                <a:spcPts val="0"/>
-              </a:spcAft>
-            </a:pPr>
-            <a:r>
-              <a:rPr sz="1300" b="0" i="0">
-                <a:solidFill>
-                  <a:srgbClr val="5A6472"/>
-                </a:solidFill>
-                <a:latin typeface="Segoe UI"/>
-              </a:rPr>
-              <a:t>true score, once fixed</a:t>
-            </a:r>
-          </a:p>
-        </p:txBody>
-      </p:sp>
-      <p:sp>
-        <p:nvSpPr>
-          <p:cNvPr id="11" name="TextBox 10"/>
-          <p:cNvSpPr txBox="1"/>
-          <p:nvPr/>
-        </p:nvSpPr>
-        <p:spPr>
-          <a:xfrm>
-            <a:off x="685800" y="5943600"/>
-            <a:ext cx="10820095" cy="502920"/>
-          </a:xfrm>
-          <a:prstGeom prst="rect">
-            <a:avLst/>
-          </a:prstGeom>
-          <a:noFill/>
-        </p:spPr>
-        <p:txBody>
-          <a:bodyPr wrap="square">
-            <a:spAutoFit/>
-          </a:bodyPr>
-          <a:lstStyle/>
-          <a:p>
-            <a:pPr algn="l">
-              <a:spcBef>
-                <a:spcPts val="0"/>
-              </a:spcBef>
-              <a:spcAft>
-                <a:spcPts val="600"/>
-              </a:spcAft>
-            </a:pPr>
-            <a:r>
-              <a:rPr sz="1500" b="0" i="1">
-                <a:solidFill>
-                  <a:srgbClr val="5A6472"/>
-                </a:solidFill>
-                <a:latin typeface="Segoe UI"/>
-              </a:rPr>
-              <a:t>A metric returning a plausible constant is more dangerous than one that crashes.</a:t>
+            <a:pPr algn="l">
+              <a:spcBef>
+                <a:spcPts val="0"/>
+              </a:spcBef>
+              <a:spcAft>
+                <a:spcPts val="1300"/>
+              </a:spcAft>
+            </a:pPr>
+            <a:r>
+              <a:rPr sz="1700" b="1" i="0">
+                <a:solidFill>
+                  <a:srgbClr val="1A1D24"/>
+                </a:solidFill>
+                <a:latin typeface="Segoe UI"/>
+              </a:rPr>
+              <a:t>The final model lost to the model it started from.</a:t>
+            </a:r>
+          </a:p>
+          <a:p>
+            <a:pPr algn="l">
+              <a:spcBef>
+                <a:spcPts val="0"/>
+              </a:spcBef>
+              <a:spcAft>
+                <a:spcPts val="1300"/>
+              </a:spcAft>
+            </a:pPr>
+            <a:r>
+              <a:rPr sz="1700" b="0" i="0">
+                <a:solidFill>
+                  <a:srgbClr val="1A1D24"/>
+                </a:solidFill>
+                <a:latin typeface="Segoe UI"/>
+              </a:rPr>
+              <a:t>Hours of compute made it measurably weaker — while the loss curve fell the entire time.</a:t>
+            </a:r>
+          </a:p>
+          <a:p>
+            <a:pPr algn="l">
+              <a:spcBef>
+                <a:spcPts val="0"/>
+              </a:spcBef>
+              <a:spcAft>
+                <a:spcPts val="1300"/>
+              </a:spcAft>
+            </a:pPr>
+            <a:r>
+              <a:rPr sz="1700" b="1" i="0">
+                <a:solidFill>
+                  <a:srgbClr val="1F4E9C"/>
+                </a:solidFill>
+                <a:latin typeface="Segoe UI"/>
+              </a:rPr>
+              <a:t>Why the loss is not a strength signal:</a:t>
+            </a:r>
+          </a:p>
+          <a:p>
+            <a:pPr algn="l">
+              <a:spcBef>
+                <a:spcPts val="0"/>
+              </a:spcBef>
+              <a:spcAft>
+                <a:spcPts val="1300"/>
+              </a:spcAft>
+            </a:pPr>
+            <a:r>
+              <a:rPr sz="1700" b="0" i="0">
+                <a:solidFill>
+                  <a:srgbClr val="1A1D24"/>
+                </a:solidFill>
+                <a:latin typeface="Segoe UI"/>
+              </a:rPr>
+              <a:t>The loss is computed against targets the model generated itself. Minimising it proves the model agrees with itself. It says nothing about whether it plays better chess.</a:t>
+            </a:r>
+          </a:p>
+          <a:p>
+            <a:pPr algn="l">
+              <a:spcBef>
+                <a:spcPts val="0"/>
+              </a:spcBef>
+              <a:spcAft>
+                <a:spcPts val="1300"/>
+              </a:spcAft>
+            </a:pPr>
+            <a:r>
+              <a:rPr sz="1700" b="0" i="0">
+                <a:solidFill>
+                  <a:srgbClr val="1A1D24"/>
+                </a:solidFill>
+                <a:latin typeface="Segoe UI"/>
+              </a:rPr>
+              <a:t>Every self-training and self-supervised pipeline shares this structure — and therefore this failure mode.</a:t>
             </a:r>
           </a:p>
         </p:txBody>
@@ -6297,7 +5786,7 @@
                 </a:solidFill>
                 <a:latin typeface="Segoe UI"/>
               </a:rPr>
-              <a:t>THE REAL RESULT</a:t>
+              <a:t>DIAGNOSIS</a:t>
             </a:r>
           </a:p>
           <a:p>
@@ -6312,11 +5801,11 @@
             <a:r>
               <a:rPr sz="3300" b="1" i="0">
                 <a:solidFill>
-                  <a:srgbClr val="B3352C"/>
-                </a:solidFill>
-                <a:latin typeface="Segoe UI"/>
-              </a:rPr>
-              <a:t>Self-play made the model worse</a:t>
+                  <a:srgbClr val="1A1D24"/>
+                </a:solidFill>
+                <a:latin typeface="Segoe UI"/>
+              </a:rPr>
+              <a:t>Two root causes, isolated by experiment</a:t>
             </a:r>
           </a:p>
         </p:txBody>
@@ -6365,50 +5854,30 @@
           </a:p>
         </p:txBody>
       </p:sp>
-      <p:sp>
-        <p:nvSpPr>
-          <p:cNvPr id="4" name="Rectangle 3"/>
-          <p:cNvSpPr/>
+      <p:pic>
+        <p:nvPicPr>
+          <p:cNvPr id="4" name="Picture 3" descr="sims_scaling.png"/>
+          <p:cNvPicPr>
+            <a:picLocks noChangeAspect="1"/>
+          </p:cNvPicPr>
           <p:nvPr/>
-        </p:nvSpPr>
-        <p:spPr>
-          <a:xfrm>
-            <a:off x="685800" y="2103120"/>
-            <a:ext cx="10820095" cy="1737360"/>
+        </p:nvPicPr>
+        <p:blipFill>
+          <a:blip r:embed="rId2"/>
+          <a:stretch>
+            <a:fillRect/>
+          </a:stretch>
+        </p:blipFill>
+        <p:spPr>
+          <a:xfrm>
+            <a:off x="685800" y="2057400"/>
+            <a:ext cx="5120640" cy="4235881"/>
           </a:xfrm>
           <a:prstGeom prst="rect">
             <a:avLst/>
           </a:prstGeom>
-          <a:solidFill>
-            <a:srgbClr val="FBF0EF"/>
-          </a:solidFill>
-          <a:ln>
-            <a:noFill/>
-          </a:ln>
-          <a:effectLst/>
-        </p:spPr>
-        <p:style>
-          <a:lnRef idx="1">
-            <a:schemeClr val="accent1"/>
-          </a:lnRef>
-          <a:fillRef idx="3">
-            <a:schemeClr val="accent1"/>
-          </a:fillRef>
-          <a:effectRef idx="2">
-            <a:schemeClr val="accent1"/>
-          </a:effectRef>
-          <a:fontRef idx="minor">
-            <a:schemeClr val="lt1"/>
-          </a:fontRef>
-        </p:style>
-        <p:txBody>
-          <a:bodyPr rtlCol="0" anchor="ctr"/>
-          <a:lstStyle/>
-          <a:p>
-            <a:pPr algn="ctr"/>
-          </a:p>
-        </p:txBody>
-      </p:sp>
+        </p:spPr>
+      </p:pic>
       <p:sp>
         <p:nvSpPr>
           <p:cNvPr id="5" name="TextBox 4"/>
@@ -6417,8 +5886,8 @@
         </p:nvSpPr>
         <p:spPr>
           <a:xfrm>
-            <a:off x="685800" y="2331720"/>
-            <a:ext cx="10820095" cy="1371600"/>
+            <a:off x="5943600" y="2011680"/>
+            <a:ext cx="5577840" cy="4297680"/>
           </a:xfrm>
           <a:prstGeom prst="rect">
             <a:avLst/>
@@ -6431,66 +5900,100 @@
           </a:bodyPr>
           <a:lstStyle/>
           <a:p>
-            <a:pPr algn="ctr">
-              <a:spcBef>
-                <a:spcPts val="0"/>
-              </a:spcBef>
-              <a:spcAft>
-                <a:spcPts val="600"/>
-              </a:spcAft>
-            </a:pPr>
-            <a:r>
-              <a:rPr sz="4000" b="1" i="0">
+            <a:pPr algn="l">
+              <a:spcBef>
+                <a:spcPts val="0"/>
+              </a:spcBef>
+              <a:spcAft>
+                <a:spcPts val="1300"/>
+              </a:spcAft>
+            </a:pPr>
+            <a:r>
+              <a:rPr sz="1500" b="1" i="0">
+                <a:solidFill>
+                  <a:srgbClr val="1F4E9C"/>
+                </a:solidFill>
+                <a:latin typeface="Segoe UI"/>
+              </a:rPr>
+              <a:t>1 · The targets were noise</a:t>
+            </a:r>
+          </a:p>
+          <a:p>
+            <a:pPr algn="l">
+              <a:spcBef>
+                <a:spcPts val="0"/>
+              </a:spcBef>
+              <a:spcAft>
+                <a:spcPts val="1300"/>
+              </a:spcAft>
+            </a:pPr>
+            <a:r>
+              <a:rPr sz="1500" b="0" i="0">
+                <a:solidFill>
+                  <a:srgbClr val="1A1D24"/>
+                </a:solidFill>
+                <a:latin typeface="Segoe UI"/>
+              </a:rPr>
+              <a:t>Search is not weak — MCTS beats the raw policy 79% at 40 simulations. But 40 simulations over ~30 legal moves is 1.3 visits per move.</a:t>
+            </a:r>
+          </a:p>
+          <a:p>
+            <a:pPr algn="l">
+              <a:spcBef>
+                <a:spcPts val="0"/>
+              </a:spcBef>
+              <a:spcAft>
+                <a:spcPts val="1300"/>
+              </a:spcAft>
+            </a:pPr>
+            <a:r>
+              <a:rPr sz="1500" b="0" i="0">
+                <a:solidFill>
+                  <a:srgbClr val="1A1D24"/>
+                </a:solidFill>
+                <a:latin typeface="Segoe UI"/>
+              </a:rPr>
+              <a:t>The best move is good; the distribution is sampling noise — and the loss trains on the distribution.</a:t>
+            </a:r>
+          </a:p>
+          <a:p>
+            <a:pPr algn="l">
+              <a:spcBef>
+                <a:spcPts val="0"/>
+              </a:spcBef>
+              <a:spcAft>
+                <a:spcPts val="1300"/>
+              </a:spcAft>
+            </a:pPr>
+            <a:r>
+              <a:rPr sz="1500" b="1" i="0">
                 <a:solidFill>
                   <a:srgbClr val="B3352C"/>
                 </a:solidFill>
                 <a:latin typeface="Segoe UI"/>
               </a:rPr>
-              <a:t>v5 final   2.5  —  5.5   its own starting point</a:t>
-            </a:r>
-          </a:p>
-          <a:p>
-            <a:pPr algn="ctr">
-              <a:spcBef>
-                <a:spcPts val="0"/>
-              </a:spcBef>
-              <a:spcAft>
-                <a:spcPts val="0"/>
+              <a:t>2 · The augmentation was illegal</a:t>
+            </a:r>
+          </a:p>
+          <a:p>
+            <a:pPr algn="l">
+              <a:spcBef>
+                <a:spcPts val="0"/>
+              </a:spcBef>
+              <a:spcAft>
+                <a:spcPts val="1300"/>
               </a:spcAft>
             </a:pPr>
             <a:r>
               <a:rPr sz="1500" b="0" i="0">
                 <a:solidFill>
-                  <a:srgbClr val="5A6472"/>
-                </a:solidFill>
-                <a:latin typeface="Segoe UI"/>
-              </a:rPr>
-              <a:t>8 games, alternating colours, randomised openings</a:t>
-            </a:r>
-          </a:p>
-        </p:txBody>
-      </p:sp>
-      <p:sp>
-        <p:nvSpPr>
-          <p:cNvPr id="6" name="TextBox 5"/>
-          <p:cNvSpPr txBox="1"/>
-          <p:nvPr/>
-        </p:nvSpPr>
-        <p:spPr>
-          <a:xfrm>
-            <a:off x="685800" y="4114800"/>
-            <a:ext cx="10820095" cy="2194560"/>
-          </a:xfrm>
-          <a:prstGeom prst="rect">
-            <a:avLst/>
-          </a:prstGeom>
-          <a:noFill/>
-        </p:spPr>
-        <p:txBody>
-          <a:bodyPr wrap="square">
-            <a:spAutoFit/>
-          </a:bodyPr>
-          <a:lstStyle/>
+                  <a:srgbClr val="1A1D24"/>
+                </a:solidFill>
+                <a:latin typeface="Segoe UI"/>
+              </a:rPr>
+              <a:t>Mirroring flipped board files but never swapped the castling planes. The king lands on d1 with “kingside castling” still set — a position that cannot exist in chess.</a:t>
+            </a:r>
+          </a:p>
           <a:p>
             <a:pPr algn="l">
               <a:spcBef>
@@ -6501,89 +6004,13 @@
               </a:spcAft>
             </a:pPr>
             <a:r>
-              <a:rPr sz="1700" b="1" i="0">
-                <a:solidFill>
-                  <a:srgbClr val="1A1D24"/>
-                </a:solidFill>
-                <a:latin typeface="Segoe UI"/>
-              </a:rPr>
-              <a:t>The final model lost to the model it started from.</a:t>
-            </a:r>
-          </a:p>
-          <a:p>
-            <a:pPr algn="l">
-              <a:spcBef>
-                <a:spcPts val="0"/>
-              </a:spcBef>
-              <a:spcAft>
-                <a:spcPts val="1300"/>
-              </a:spcAft>
-            </a:pPr>
-            <a:r>
-              <a:rPr sz="1700" b="0" i="0">
-                <a:solidFill>
-                  <a:srgbClr val="1A1D24"/>
-                </a:solidFill>
-                <a:latin typeface="Segoe UI"/>
-              </a:rPr>
-              <a:t>Hours of compute made it measurably weaker — while the loss curve fell the entire time.</a:t>
-            </a:r>
-          </a:p>
-          <a:p>
-            <a:pPr algn="l">
-              <a:spcBef>
-                <a:spcPts val="0"/>
-              </a:spcBef>
-              <a:spcAft>
-                <a:spcPts val="1300"/>
-              </a:spcAft>
-            </a:pPr>
-            <a:r>
-              <a:rPr sz="1700" b="1" i="0">
-                <a:solidFill>
-                  <a:srgbClr val="1F4E9C"/>
-                </a:solidFill>
-                <a:latin typeface="Segoe UI"/>
-              </a:rPr>
-              <a:t>Why the loss is not a strength signal:</a:t>
-            </a:r>
-          </a:p>
-          <a:p>
-            <a:pPr algn="l">
-              <a:spcBef>
-                <a:spcPts val="0"/>
-              </a:spcBef>
-              <a:spcAft>
-                <a:spcPts val="1300"/>
-              </a:spcAft>
-            </a:pPr>
-            <a:r>
-              <a:rPr sz="1700" b="0" i="0">
-                <a:solidFill>
-                  <a:srgbClr val="1A1D24"/>
-                </a:solidFill>
-                <a:latin typeface="Segoe UI"/>
-              </a:rPr>
-              <a:t>The loss is computed against targets the model generated itself. Minimising it proves the model agrees with itself. It says nothing about whether it plays better chess.</a:t>
-            </a:r>
-          </a:p>
-          <a:p>
-            <a:pPr algn="l">
-              <a:spcBef>
-                <a:spcPts val="0"/>
-              </a:spcBef>
-              <a:spcAft>
-                <a:spcPts val="1300"/>
-              </a:spcAft>
-            </a:pPr>
-            <a:r>
-              <a:rPr sz="1700" b="0" i="0">
-                <a:solidFill>
-                  <a:srgbClr val="1A1D24"/>
-                </a:solidFill>
-                <a:latin typeface="Segoe UI"/>
-              </a:rPr>
-              <a:t>Every self-training and self-supervised pipeline shares this structure — and therefore this failure mode.</a:t>
+              <a:rPr sz="1500" b="1" i="0">
+                <a:solidFill>
+                  <a:srgbClr val="B3352C"/>
+                </a:solidFill>
+                <a:latin typeface="Segoe UI"/>
+              </a:rPr>
+              <a:t>~50% of every training batch was corrupted.</a:t>
             </a:r>
           </a:p>
         </p:txBody>
@@ -6651,7 +6078,7 @@
                 </a:solidFill>
                 <a:latin typeface="Segoe UI"/>
               </a:rPr>
-              <a:t>DIAGNOSIS</a:t>
+              <a:t>THE FIX</a:t>
             </a:r>
           </a:p>
           <a:p>
@@ -6666,11 +6093,11 @@
             <a:r>
               <a:rPr sz="3300" b="1" i="0">
                 <a:solidFill>
-                  <a:srgbClr val="1A1D24"/>
-                </a:solidFill>
-                <a:latin typeface="Segoe UI"/>
-              </a:rPr>
-              <a:t>Two root causes, isolated by experiment</a:t>
+                  <a:srgbClr val="1A7F4B"/>
+                </a:solidFill>
+                <a:latin typeface="Segoe UI"/>
+              </a:rPr>
+              <a:t>Gating stopped the bleeding</a:t>
             </a:r>
           </a:p>
         </p:txBody>
@@ -6719,40 +6146,16 @@
           </a:p>
         </p:txBody>
       </p:sp>
-      <p:pic>
-        <p:nvPicPr>
-          <p:cNvPr id="4" name="Picture 3" descr="sims_scaling.png"/>
-          <p:cNvPicPr>
-            <a:picLocks noChangeAspect="1"/>
-          </p:cNvPicPr>
-          <p:nvPr/>
-        </p:nvPicPr>
-        <p:blipFill>
-          <a:blip r:embed="rId2"/>
-          <a:stretch>
-            <a:fillRect/>
-          </a:stretch>
-        </p:blipFill>
-        <p:spPr>
-          <a:xfrm>
-            <a:off x="685800" y="2057400"/>
-            <a:ext cx="5120640" cy="4235881"/>
-          </a:xfrm>
-          <a:prstGeom prst="rect">
-            <a:avLst/>
-          </a:prstGeom>
-        </p:spPr>
-      </p:pic>
-      <p:sp>
-        <p:nvSpPr>
-          <p:cNvPr id="5" name="TextBox 4"/>
+      <p:sp>
+        <p:nvSpPr>
+          <p:cNvPr id="4" name="TextBox 3"/>
           <p:cNvSpPr txBox="1"/>
           <p:nvPr/>
         </p:nvSpPr>
         <p:spPr>
           <a:xfrm>
-            <a:off x="5943600" y="2011680"/>
-            <a:ext cx="5577840" cy="4297680"/>
+            <a:off x="685800" y="1920240"/>
+            <a:ext cx="6400800" cy="4389120"/>
           </a:xfrm>
           <a:prstGeom prst="rect">
             <a:avLst/>
@@ -6774,13 +6177,13 @@
               </a:spcAft>
             </a:pPr>
             <a:r>
-              <a:rPr sz="1500" b="1" i="0">
-                <a:solidFill>
-                  <a:srgbClr val="1F4E9C"/>
-                </a:solidFill>
-                <a:latin typeface="Segoe UI"/>
-              </a:rPr>
-              <a:t>1 · The targets were noise</a:t>
+              <a:rPr sz="1600" b="1" i="0">
+                <a:solidFill>
+                  <a:srgbClr val="1A7F4B"/>
+                </a:solidFill>
+                <a:latin typeface="Segoe UI"/>
+              </a:rPr>
+              <a:t>Acceptance gating, from AlphaGo Zero</a:t>
             </a:r>
           </a:p>
           <a:p>
@@ -6793,13 +6196,13 @@
               </a:spcAft>
             </a:pPr>
             <a:r>
-              <a:rPr sz="1500" b="0" i="0">
+              <a:rPr sz="1600" b="0" i="0">
                 <a:solidFill>
                   <a:srgbClr val="1A1D24"/>
                 </a:solidFill>
                 <a:latin typeface="Segoe UI"/>
               </a:rPr>
-              <a:t>Search is not weak — MCTS beats the raw policy 79% at 40 simulations. But 40 simulations over ~30 legal moves is 1.3 visits per move.</a:t>
+              <a:t>Self-play always generates from the best weights so far; new weights are promoted only after scoring ≥ 55% against the incumbent.</a:t>
             </a:r>
           </a:p>
           <a:p>
@@ -6812,13 +6215,13 @@
               </a:spcAft>
             </a:pPr>
             <a:r>
-              <a:rPr sz="1500" b="0" i="0">
+              <a:rPr sz="1600" b="0" i="0">
                 <a:solidFill>
                   <a:srgbClr val="1A1D24"/>
                 </a:solidFill>
                 <a:latin typeface="Segoe UI"/>
               </a:rPr>
-              <a:t>The best move is good; the distribution is sampling noise — and the loss trains on the distribution.</a:t>
+              <a:t>Plus castling-aware augmentation, 128 simulations instead of 40, 80 gradient steps instead of 200.</a:t>
             </a:r>
           </a:p>
           <a:p>
@@ -6831,51 +6234,297 @@
               </a:spcAft>
             </a:pPr>
             <a:r>
-              <a:rPr sz="1500" b="1" i="0">
+              <a:rPr sz="1600" b="1" i="0">
+                <a:solidFill>
+                  <a:srgbClr val="1A7F4B"/>
+                </a:solidFill>
+                <a:latin typeface="Segoe UI"/>
+              </a:rPr>
+              <a:t>199 iterations later — no regression.</a:t>
+            </a:r>
+          </a:p>
+          <a:p>
+            <a:pPr algn="l">
+              <a:spcBef>
+                <a:spcPts val="0"/>
+              </a:spcBef>
+              <a:spcAft>
+                <a:spcPts val="1300"/>
+              </a:spcAft>
+            </a:pPr>
+            <a:r>
+              <a:rPr sz="1600" b="0" i="0">
+                <a:solidFill>
+                  <a:srgbClr val="1A1D24"/>
+                </a:solidFill>
+                <a:latin typeface="Segoe UI"/>
+              </a:rPr>
+              <a:t>The candidates the gate rejected averaged 42.2% vs baseline (p = 0.004): self-play was still degrading the network.</a:t>
+            </a:r>
+          </a:p>
+          <a:p>
+            <a:pPr algn="l">
+              <a:spcBef>
+                <a:spcPts val="0"/>
+              </a:spcBef>
+              <a:spcAft>
+                <a:spcPts val="1300"/>
+              </a:spcAft>
+            </a:pPr>
+            <a:r>
+              <a:rPr sz="1600" b="0" i="0">
+                <a:solidFill>
+                  <a:srgbClr val="1A1D24"/>
+                </a:solidFill>
+                <a:latin typeface="Segoe UI"/>
+              </a:rPr>
+              <a:t>The gate kept that damage out of the deployed model.</a:t>
+            </a:r>
+          </a:p>
+        </p:txBody>
+      </p:sp>
+      <p:sp>
+        <p:nvSpPr>
+          <p:cNvPr id="5" name="Rectangle 4"/>
+          <p:cNvSpPr/>
+          <p:nvPr/>
+        </p:nvSpPr>
+        <p:spPr>
+          <a:xfrm>
+            <a:off x="7498079" y="2194560"/>
+            <a:ext cx="4023360" cy="1097280"/>
+          </a:xfrm>
+          <a:prstGeom prst="rect">
+            <a:avLst/>
+          </a:prstGeom>
+          <a:solidFill>
+            <a:srgbClr val="F7F7F4"/>
+          </a:solidFill>
+          <a:ln>
+            <a:noFill/>
+          </a:ln>
+          <a:effectLst/>
+        </p:spPr>
+        <p:style>
+          <a:lnRef idx="1">
+            <a:schemeClr val="accent1"/>
+          </a:lnRef>
+          <a:fillRef idx="3">
+            <a:schemeClr val="accent1"/>
+          </a:fillRef>
+          <a:effectRef idx="2">
+            <a:schemeClr val="accent1"/>
+          </a:effectRef>
+          <a:fontRef idx="minor">
+            <a:schemeClr val="lt1"/>
+          </a:fontRef>
+        </p:style>
+        <p:txBody>
+          <a:bodyPr rtlCol="0" anchor="ctr"/>
+          <a:lstStyle/>
+          <a:p>
+            <a:pPr algn="ctr"/>
+          </a:p>
+        </p:txBody>
+      </p:sp>
+      <p:sp>
+        <p:nvSpPr>
+          <p:cNvPr id="6" name="TextBox 5"/>
+          <p:cNvSpPr txBox="1"/>
+          <p:nvPr/>
+        </p:nvSpPr>
+        <p:spPr>
+          <a:xfrm>
+            <a:off x="7699247" y="2340864"/>
+            <a:ext cx="3657600" cy="1097280"/>
+          </a:xfrm>
+          <a:prstGeom prst="rect">
+            <a:avLst/>
+          </a:prstGeom>
+          <a:noFill/>
+        </p:spPr>
+        <p:txBody>
+          <a:bodyPr wrap="square">
+            <a:spAutoFit/>
+          </a:bodyPr>
+          <a:lstStyle/>
+          <a:p>
+            <a:pPr>
+              <a:spcAft>
+                <a:spcPts val="500"/>
+              </a:spcAft>
+            </a:pPr>
+            <a:r>
+              <a:rPr sz="1500">
+                <a:solidFill>
+                  <a:srgbClr val="1A1D24"/>
+                </a:solidFill>
+                <a:latin typeface="Consolas"/>
+              </a:rPr>
+              <a:t>gate: candidate 43.8%</a:t>
+            </a:r>
+          </a:p>
+          <a:p>
+            <a:pPr>
+              <a:spcAft>
+                <a:spcPts val="500"/>
+              </a:spcAft>
+            </a:pPr>
+            <a:r>
+              <a:rPr sz="1500">
                 <a:solidFill>
                   <a:srgbClr val="B3352C"/>
                 </a:solidFill>
-                <a:latin typeface="Segoe UI"/>
-              </a:rPr>
-              <a:t>2 · The augmentation was illegal</a:t>
-            </a:r>
-          </a:p>
-          <a:p>
-            <a:pPr algn="l">
-              <a:spcBef>
-                <a:spcPts val="0"/>
-              </a:spcBef>
-              <a:spcAft>
-                <a:spcPts val="1300"/>
-              </a:spcAft>
-            </a:pPr>
-            <a:r>
-              <a:rPr sz="1500" b="0" i="0">
-                <a:solidFill>
-                  <a:srgbClr val="1A1D24"/>
-                </a:solidFill>
-                <a:latin typeface="Segoe UI"/>
-              </a:rPr>
-              <a:t>Mirroring flipped board files but never swapped the castling planes. The king lands on d1 with “kingside castling” still set — a position that cannot exist in chess.</a:t>
-            </a:r>
-          </a:p>
-          <a:p>
-            <a:pPr algn="l">
-              <a:spcBef>
-                <a:spcPts val="0"/>
-              </a:spcBef>
-              <a:spcAft>
-                <a:spcPts val="1300"/>
-              </a:spcAft>
-            </a:pPr>
-            <a:r>
-              <a:rPr sz="1500" b="1" i="0">
-                <a:solidFill>
-                  <a:srgbClr val="B3352C"/>
-                </a:solidFill>
-                <a:latin typeface="Segoe UI"/>
-              </a:rPr>
-              <a:t>~50% of every training batch was corrupted.</a:t>
+                <a:latin typeface="Consolas"/>
+              </a:rPr>
+              <a:t>      vs best -&gt; rejected</a:t>
+            </a:r>
+          </a:p>
+        </p:txBody>
+      </p:sp>
+      <p:sp>
+        <p:nvSpPr>
+          <p:cNvPr id="7" name="Rectangle 6"/>
+          <p:cNvSpPr/>
+          <p:nvPr/>
+        </p:nvSpPr>
+        <p:spPr>
+          <a:xfrm>
+            <a:off x="7498079" y="3657600"/>
+            <a:ext cx="4023360" cy="1508760"/>
+          </a:xfrm>
+          <a:prstGeom prst="rect">
+            <a:avLst/>
+          </a:prstGeom>
+          <a:solidFill>
+            <a:srgbClr val="F2F5F9"/>
+          </a:solidFill>
+          <a:ln>
+            <a:noFill/>
+          </a:ln>
+          <a:effectLst/>
+        </p:spPr>
+        <p:style>
+          <a:lnRef idx="1">
+            <a:schemeClr val="accent1"/>
+          </a:lnRef>
+          <a:fillRef idx="3">
+            <a:schemeClr val="accent1"/>
+          </a:fillRef>
+          <a:effectRef idx="2">
+            <a:schemeClr val="accent1"/>
+          </a:effectRef>
+          <a:fontRef idx="minor">
+            <a:schemeClr val="lt1"/>
+          </a:fontRef>
+        </p:style>
+        <p:txBody>
+          <a:bodyPr rtlCol="0" anchor="ctr"/>
+          <a:lstStyle/>
+          <a:p>
+            <a:pPr algn="ctr"/>
+          </a:p>
+        </p:txBody>
+      </p:sp>
+      <p:sp>
+        <p:nvSpPr>
+          <p:cNvPr id="8" name="TextBox 7"/>
+          <p:cNvSpPr txBox="1"/>
+          <p:nvPr/>
+        </p:nvSpPr>
+        <p:spPr>
+          <a:xfrm>
+            <a:off x="7498079" y="3822192"/>
+            <a:ext cx="4023360" cy="1188720"/>
+          </a:xfrm>
+          <a:prstGeom prst="rect">
+            <a:avLst/>
+          </a:prstGeom>
+          <a:noFill/>
+        </p:spPr>
+        <p:txBody>
+          <a:bodyPr wrap="square">
+            <a:spAutoFit/>
+          </a:bodyPr>
+          <a:lstStyle/>
+          <a:p>
+            <a:pPr algn="ctr">
+              <a:spcBef>
+                <a:spcPts val="0"/>
+              </a:spcBef>
+              <a:spcAft>
+                <a:spcPts val="200"/>
+              </a:spcAft>
+            </a:pPr>
+            <a:r>
+              <a:rPr sz="3800" b="1" i="0">
+                <a:solidFill>
+                  <a:srgbClr val="1A7F4B"/>
+                </a:solidFill>
+                <a:latin typeface="Segoe UI"/>
+              </a:rPr>
+              <a:t>46.2%</a:t>
+            </a:r>
+          </a:p>
+          <a:p>
+            <a:pPr algn="ctr">
+              <a:spcBef>
+                <a:spcPts val="0"/>
+              </a:spcBef>
+              <a:spcAft>
+                <a:spcPts val="0"/>
+              </a:spcAft>
+            </a:pPr>
+            <a:r>
+              <a:rPr sz="1300" b="0" i="0">
+                <a:solidFill>
+                  <a:srgbClr val="5A6472"/>
+                </a:solidFill>
+                <a:latin typeface="Segoe UI"/>
+              </a:rPr>
+              <a:t>gated model vs its starting point — no detectable change</a:t>
+            </a:r>
+          </a:p>
+        </p:txBody>
+      </p:sp>
+      <p:sp>
+        <p:nvSpPr>
+          <p:cNvPr id="9" name="TextBox 8"/>
+          <p:cNvSpPr txBox="1"/>
+          <p:nvPr/>
+        </p:nvSpPr>
+        <p:spPr>
+          <a:xfrm>
+            <a:off x="685800" y="5943600"/>
+            <a:ext cx="10820095" cy="502920"/>
+          </a:xfrm>
+          <a:prstGeom prst="rect">
+            <a:avLst/>
+          </a:prstGeom>
+          <a:noFill/>
+        </p:spPr>
+        <p:txBody>
+          <a:bodyPr wrap="square">
+            <a:spAutoFit/>
+          </a:bodyPr>
+          <a:lstStyle/>
+          <a:p>
+            <a:pPr algn="l">
+              <a:spcBef>
+                <a:spcPts val="0"/>
+              </a:spcBef>
+              <a:spcAft>
+                <a:spcPts val="600"/>
+              </a:spcAft>
+            </a:pPr>
+            <a:r>
+              <a:rPr sz="1500" b="0" i="1">
+                <a:solidFill>
+                  <a:srgbClr val="5A6472"/>
+                </a:solidFill>
+                <a:latin typeface="Segoe UI"/>
+              </a:rPr>
+              <a:t>v5 without the fixes: 31.2%. Gating converted a real regression into no change.</a:t>
             </a:r>
           </a:p>
         </p:txBody>
@@ -6943,7 +6592,7 @@
                 </a:solidFill>
                 <a:latin typeface="Segoe UI"/>
               </a:rPr>
-              <a:t>THE FIX</a:t>
+              <a:t>WHAT I TAKE AWAY</a:t>
             </a:r>
           </a:p>
           <a:p>
@@ -6958,11 +6607,11 @@
             <a:r>
               <a:rPr sz="3300" b="1" i="0">
                 <a:solidFill>
-                  <a:srgbClr val="1A7F4B"/>
-                </a:solidFill>
-                <a:latin typeface="Segoe UI"/>
-              </a:rPr>
-              <a:t>Gating stopped the bleeding</a:t>
+                  <a:srgbClr val="1A1D24"/>
+                </a:solidFill>
+                <a:latin typeface="Segoe UI"/>
+              </a:rPr>
+              <a:t>Measurement is the hard part</a:t>
             </a:r>
           </a:p>
         </p:txBody>
@@ -7019,8 +6668,8 @@
         </p:nvSpPr>
         <p:spPr>
           <a:xfrm>
-            <a:off x="685800" y="1920240"/>
-            <a:ext cx="6400800" cy="4389120"/>
+            <a:off x="685800" y="1874519"/>
+            <a:ext cx="6949440" cy="4434841"/>
           </a:xfrm>
           <a:prstGeom prst="rect">
             <a:avLst/>
@@ -7044,11 +6693,11 @@
             <a:r>
               <a:rPr sz="1600" b="1" i="0">
                 <a:solidFill>
-                  <a:srgbClr val="1A7F4B"/>
-                </a:solidFill>
-                <a:latin typeface="Segoe UI"/>
-              </a:rPr>
-              <a:t>Acceptance gating, from AlphaGo Zero</a:t>
+                  <a:srgbClr val="1A1D24"/>
+                </a:solidFill>
+                <a:latin typeface="Segoe UI"/>
+              </a:rPr>
+              <a:t>A falling loss curve is not evidence that anything is working.</a:t>
             </a:r>
           </a:p>
           <a:p>
@@ -7067,7 +6716,7 @@
                 </a:solidFill>
                 <a:latin typeface="Segoe UI"/>
               </a:rPr>
-              <a:t>Self-play always generates from the best weights so far; new weights are promoted only after scoring ≥ 55% against the incumbent.</a:t>
+              <a:t>Especially when the model produces its own labels.</a:t>
             </a:r>
           </a:p>
           <a:p>
@@ -7080,13 +6729,32 @@
               </a:spcAft>
             </a:pPr>
             <a:r>
+              <a:rPr sz="1600" b="1" i="0">
+                <a:solidFill>
+                  <a:srgbClr val="1A1D24"/>
+                </a:solidFill>
+                <a:latin typeface="Segoe UI"/>
+              </a:rPr>
+              <a:t>Verify the metric before trusting the model.</a:t>
+            </a:r>
+          </a:p>
+          <a:p>
+            <a:pPr algn="l">
+              <a:spcBef>
+                <a:spcPts val="0"/>
+              </a:spcBef>
+              <a:spcAft>
+                <a:spcPts val="1300"/>
+              </a:spcAft>
+            </a:pPr>
+            <a:r>
               <a:rPr sz="1600" b="0" i="0">
                 <a:solidFill>
                   <a:srgbClr val="1A1D24"/>
                 </a:solidFill>
                 <a:latin typeface="Segoe UI"/>
               </a:rPr>
-              <a:t>Plus castling-aware augmentation, 128 simulations instead of 40, 80 gradient steps instead of 200.</a:t>
+              <a:t>Mine returned a plausible number 159 times in a row while measuring nothing at all.</a:t>
             </a:r>
           </a:p>
           <a:p>
@@ -7101,11 +6769,11 @@
             <a:r>
               <a:rPr sz="1600" b="1" i="0">
                 <a:solidFill>
-                  <a:srgbClr val="1A7F4B"/>
-                </a:solidFill>
-                <a:latin typeface="Segoe UI"/>
-              </a:rPr>
-              <a:t>199 iterations later — no regression.</a:t>
+                  <a:srgbClr val="1A1D24"/>
+                </a:solidFill>
+                <a:latin typeface="Segoe UI"/>
+              </a:rPr>
+              <a:t>Downscaling changes which statistic matters.</a:t>
             </a:r>
           </a:p>
           <a:p>
@@ -7124,7 +6792,7 @@
                 </a:solidFill>
                 <a:latin typeface="Segoe UI"/>
               </a:rPr>
-              <a:t>The candidates the gate rejected averaged 42.2% vs baseline (p = 0.004): self-play was still degrading the network.</a:t>
+              <a:t>800 → 40 simulations preserves the best move but destroys the distribution — and the loss reads the distribution.</a:t>
             </a:r>
           </a:p>
           <a:p>
@@ -7137,13 +6805,32 @@
               </a:spcAft>
             </a:pPr>
             <a:r>
+              <a:rPr sz="1600" b="1" i="0">
+                <a:solidFill>
+                  <a:srgbClr val="B3352C"/>
+                </a:solidFill>
+                <a:latin typeface="Segoe UI"/>
+              </a:rPr>
+              <a:t>Then audit the fix too.</a:t>
+            </a:r>
+          </a:p>
+          <a:p>
+            <a:pPr algn="l">
+              <a:spcBef>
+                <a:spcPts val="0"/>
+              </a:spcBef>
+              <a:spcAft>
+                <a:spcPts val="1300"/>
+              </a:spcAft>
+            </a:pPr>
+            <a:r>
               <a:rPr sz="1600" b="0" i="0">
                 <a:solidFill>
                   <a:srgbClr val="1A1D24"/>
                 </a:solidFill>
                 <a:latin typeface="Segoe UI"/>
               </a:rPr>
-              <a:t>The gate kept that damage out of the deployed model.</a:t>
+              <a:t>My gate promoted 8 of 20 candidates. Pure chance predicts 7.8 — an 8-game match could never have resolved this. The same mistake, one level up.</a:t>
             </a:r>
           </a:p>
         </p:txBody>
@@ -7156,14 +6843,14 @@
         </p:nvSpPr>
         <p:spPr>
           <a:xfrm>
-            <a:off x="7498079" y="2194560"/>
-            <a:ext cx="4023360" cy="1097280"/>
+            <a:off x="8138160" y="2103120"/>
+            <a:ext cx="3291840" cy="3108960"/>
           </a:xfrm>
           <a:prstGeom prst="rect">
             <a:avLst/>
           </a:prstGeom>
           <a:solidFill>
-            <a:srgbClr val="F7F7F4"/>
+            <a:srgbClr val="F2F5F9"/>
           </a:solidFill>
           <a:ln>
             <a:noFill/>
@@ -7200,8 +6887,8 @@
         </p:nvSpPr>
         <p:spPr>
           <a:xfrm>
-            <a:off x="7699247" y="2340864"/>
-            <a:ext cx="3657600" cy="1097280"/>
+            <a:off x="8366760" y="2331720"/>
+            <a:ext cx="2834640" cy="2743200"/>
           </a:xfrm>
           <a:prstGeom prst="rect">
             <a:avLst/>
@@ -7214,106 +6901,64 @@
           </a:bodyPr>
           <a:lstStyle/>
           <a:p>
-            <a:pPr>
-              <a:spcAft>
-                <a:spcPts val="500"/>
-              </a:spcAft>
-            </a:pPr>
-            <a:r>
-              <a:rPr sz="1500">
+            <a:pPr algn="l">
+              <a:spcBef>
+                <a:spcPts val="0"/>
+              </a:spcBef>
+              <a:spcAft>
+                <a:spcPts val="1200"/>
+              </a:spcAft>
+            </a:pPr>
+            <a:r>
+              <a:rPr sz="1700" b="1" i="0">
+                <a:solidFill>
+                  <a:srgbClr val="1F4E9C"/>
+                </a:solidFill>
+                <a:latin typeface="Segoe UI"/>
+              </a:rPr>
+              <a:t>Artifacts</a:t>
+            </a:r>
+          </a:p>
+          <a:p>
+            <a:pPr algn="l">
+              <a:spcBef>
+                <a:spcPts val="0"/>
+              </a:spcBef>
+              <a:spcAft>
+                <a:spcPts val="200"/>
+              </a:spcAft>
+            </a:pPr>
+            <a:r>
+              <a:rPr sz="1300" b="1" i="0">
+                <a:solidFill>
+                  <a:srgbClr val="5A6472"/>
+                </a:solidFill>
+                <a:latin typeface="Segoe UI"/>
+              </a:rPr>
+              <a:t>Code</a:t>
+            </a:r>
+          </a:p>
+          <a:p>
+            <a:pPr algn="l">
+              <a:spcBef>
+                <a:spcPts val="0"/>
+              </a:spcBef>
+              <a:spcAft>
+                <a:spcPts val="1200"/>
+              </a:spcAft>
+            </a:pPr>
+            <a:r>
+              <a:rPr sz="1200" b="0" i="0">
                 <a:solidFill>
                   <a:srgbClr val="1A1D24"/>
                 </a:solidFill>
-                <a:latin typeface="Consolas"/>
-              </a:rPr>
-              <a:t>gate: candidate 43.8%</a:t>
-            </a:r>
-          </a:p>
-          <a:p>
-            <a:pPr>
-              <a:spcAft>
-                <a:spcPts val="500"/>
-              </a:spcAft>
-            </a:pPr>
-            <a:r>
-              <a:rPr sz="1500">
-                <a:solidFill>
-                  <a:srgbClr val="B3352C"/>
-                </a:solidFill>
-                <a:latin typeface="Consolas"/>
-              </a:rPr>
-              <a:t>      vs best -&gt; rejected</a:t>
-            </a:r>
-          </a:p>
-        </p:txBody>
-      </p:sp>
-      <p:sp>
-        <p:nvSpPr>
-          <p:cNvPr id="7" name="Rectangle 6"/>
-          <p:cNvSpPr/>
-          <p:nvPr/>
-        </p:nvSpPr>
-        <p:spPr>
-          <a:xfrm>
-            <a:off x="7498079" y="3657600"/>
-            <a:ext cx="4023360" cy="1508760"/>
-          </a:xfrm>
-          <a:prstGeom prst="rect">
-            <a:avLst/>
-          </a:prstGeom>
-          <a:solidFill>
-            <a:srgbClr val="F2F5F9"/>
-          </a:solidFill>
-          <a:ln>
-            <a:noFill/>
-          </a:ln>
-          <a:effectLst/>
-        </p:spPr>
-        <p:style>
-          <a:lnRef idx="1">
-            <a:schemeClr val="accent1"/>
-          </a:lnRef>
-          <a:fillRef idx="3">
-            <a:schemeClr val="accent1"/>
-          </a:fillRef>
-          <a:effectRef idx="2">
-            <a:schemeClr val="accent1"/>
-          </a:effectRef>
-          <a:fontRef idx="minor">
-            <a:schemeClr val="lt1"/>
-          </a:fontRef>
-        </p:style>
-        <p:txBody>
-          <a:bodyPr rtlCol="0" anchor="ctr"/>
-          <a:lstStyle/>
-          <a:p>
-            <a:pPr algn="ctr"/>
-          </a:p>
-        </p:txBody>
-      </p:sp>
-      <p:sp>
-        <p:nvSpPr>
-          <p:cNvPr id="8" name="TextBox 7"/>
-          <p:cNvSpPr txBox="1"/>
-          <p:nvPr/>
-        </p:nvSpPr>
-        <p:spPr>
-          <a:xfrm>
-            <a:off x="7498079" y="3822192"/>
-            <a:ext cx="4023360" cy="1188720"/>
-          </a:xfrm>
-          <a:prstGeom prst="rect">
-            <a:avLst/>
-          </a:prstGeom>
-          <a:noFill/>
-        </p:spPr>
-        <p:txBody>
-          <a:bodyPr wrap="square">
-            <a:spAutoFit/>
-          </a:bodyPr>
-          <a:lstStyle/>
-          <a:p>
-            <a:pPr algn="ctr">
+                <a:latin typeface="Segoe UI"/>
+              </a:rPr>
+              <a:t>github.com/realgauravvyas/chess-ai</a:t>
+            </a:r>
+          </a:p>
+          <a:p>
+            <a:pPr algn="l">
               <a:spcBef>
                 <a:spcPts val="0"/>
               </a:spcBef>
@@ -7322,74 +6967,70 @@
               </a:spcAft>
             </a:pPr>
             <a:r>
-              <a:rPr sz="3800" b="1" i="0">
-                <a:solidFill>
-                  <a:srgbClr val="1A7F4B"/>
-                </a:solidFill>
-                <a:latin typeface="Segoe UI"/>
-              </a:rPr>
-              <a:t>46.2%</a:t>
-            </a:r>
-          </a:p>
-          <a:p>
-            <a:pPr algn="ctr">
-              <a:spcBef>
-                <a:spcPts val="0"/>
-              </a:spcBef>
-              <a:spcAft>
-                <a:spcPts val="0"/>
-              </a:spcAft>
-            </a:pPr>
-            <a:r>
-              <a:rPr sz="1300" b="0" i="0">
+              <a:rPr sz="1300" b="1" i="0">
                 <a:solidFill>
                   <a:srgbClr val="5A6472"/>
                 </a:solidFill>
                 <a:latin typeface="Segoe UI"/>
               </a:rPr>
-              <a:t>gated model vs its starting point — no detectable change</a:t>
-            </a:r>
-          </a:p>
-        </p:txBody>
-      </p:sp>
-      <p:sp>
-        <p:nvSpPr>
-          <p:cNvPr id="9" name="TextBox 8"/>
-          <p:cNvSpPr txBox="1"/>
-          <p:nvPr/>
-        </p:nvSpPr>
-        <p:spPr>
-          <a:xfrm>
-            <a:off x="685800" y="5943600"/>
-            <a:ext cx="10820095" cy="502920"/>
-          </a:xfrm>
-          <a:prstGeom prst="rect">
-            <a:avLst/>
-          </a:prstGeom>
-          <a:noFill/>
-        </p:spPr>
-        <p:txBody>
-          <a:bodyPr wrap="square">
-            <a:spAutoFit/>
-          </a:bodyPr>
-          <a:lstStyle/>
-          <a:p>
-            <a:pPr algn="l">
-              <a:spcBef>
-                <a:spcPts val="0"/>
-              </a:spcBef>
-              <a:spcAft>
-                <a:spcPts val="600"/>
-              </a:spcAft>
-            </a:pPr>
-            <a:r>
-              <a:rPr sz="1500" b="0" i="1">
+              <a:t>Results</a:t>
+            </a:r>
+          </a:p>
+          <a:p>
+            <a:pPr algn="l">
+              <a:spcBef>
+                <a:spcPts val="0"/>
+              </a:spcBef>
+              <a:spcAft>
+                <a:spcPts val="1200"/>
+              </a:spcAft>
+            </a:pPr>
+            <a:r>
+              <a:rPr sz="1200" b="0" i="0">
+                <a:solidFill>
+                  <a:srgbClr val="1A1D24"/>
+                </a:solidFill>
+                <a:latin typeface="Segoe UI"/>
+              </a:rPr>
+              <a:t>RESULTS.md — every number, reproducible</a:t>
+            </a:r>
+          </a:p>
+          <a:p>
+            <a:pPr algn="l">
+              <a:spcBef>
+                <a:spcPts val="0"/>
+              </a:spcBef>
+              <a:spcAft>
+                <a:spcPts val="200"/>
+              </a:spcAft>
+            </a:pPr>
+            <a:r>
+              <a:rPr sz="1300" b="1" i="0">
                 <a:solidFill>
                   <a:srgbClr val="5A6472"/>
                 </a:solidFill>
                 <a:latin typeface="Segoe UI"/>
               </a:rPr>
-              <a:t>v5 without the fixes: 31.2%. Gating converted a real regression into no change.</a:t>
+              <a:t>Demo</a:t>
+            </a:r>
+          </a:p>
+          <a:p>
+            <a:pPr algn="l">
+              <a:spcBef>
+                <a:spcPts val="0"/>
+              </a:spcBef>
+              <a:spcAft>
+                <a:spcPts val="0"/>
+              </a:spcAft>
+            </a:pPr>
+            <a:r>
+              <a:rPr sz="1200" b="0" i="0">
+                <a:solidFill>
+                  <a:srgbClr val="1A1D24"/>
+                </a:solidFill>
+                <a:latin typeface="Segoe UI"/>
+              </a:rPr>
+              <a:t>Live training dashboard + play any checkpoint</a:t>
             </a:r>
           </a:p>
         </p:txBody>

--- a/docs/chess_ai_slides.pptx
+++ b/docs/chess_ai_slides.pptx
@@ -3240,13 +3240,32 @@
               </a:spcAft>
             </a:pPr>
             <a:r>
-              <a:rPr sz="1900" b="1" i="0">
+              <a:rPr sz="1700" b="1" i="0">
+                <a:solidFill>
+                  <a:srgbClr val="1F4E9C"/>
+                </a:solidFill>
+                <a:latin typeface="Segoe UI"/>
+              </a:rPr>
+              <a:t>Following AlphaZero — DeepMind, 2017</a:t>
+            </a:r>
+          </a:p>
+          <a:p>
+            <a:pPr algn="l">
+              <a:spcBef>
+                <a:spcPts val="0"/>
+              </a:spcBef>
+              <a:spcAft>
+                <a:spcPts val="1300"/>
+              </a:spcAft>
+            </a:pPr>
+            <a:r>
+              <a:rPr sz="1700" b="0" i="0">
                 <a:solidFill>
                   <a:srgbClr val="1A1D24"/>
                 </a:solidFill>
                 <a:latin typeface="Segoe UI"/>
               </a:rPr>
-              <a:t>No opening book. No piece values. No evaluation function.</a:t>
+              <a:t>DeepMind showed one network, trained only by playing itself, could master chess, shogi and Go and beat the strongest engines of the day.</a:t>
             </a:r>
           </a:p>
           <a:p>
@@ -3259,13 +3278,13 @@
               </a:spcAft>
             </a:pPr>
             <a:r>
-              <a:rPr sz="1900" b="0" i="0">
+              <a:rPr sz="1700" b="1" i="0">
                 <a:solidFill>
                   <a:srgbClr val="1A1D24"/>
                 </a:solidFill>
                 <a:latin typeface="Segoe UI"/>
               </a:rPr>
-              <a:t>Input: the rules, plus human games. Everything else is learned.</a:t>
+              <a:t>This project reproduces that recipe at ~1/1,000,000 the compute.</a:t>
             </a:r>
           </a:p>
           <a:p>
@@ -3278,13 +3297,13 @@
               </a:spcAft>
             </a:pPr>
             <a:r>
-              <a:rPr sz="1900" b="0" i="0">
+              <a:rPr sz="1700" b="0" i="0">
                 <a:solidFill>
                   <a:srgbClr val="1A1D24"/>
                 </a:solidFill>
                 <a:latin typeface="Segoe UI"/>
               </a:rPr>
-              <a:t>One network, two heads — policy (which moves look good) and value (who is winning).</a:t>
+              <a:t>No opening book, no piece values, no evaluation function — just the rules and data.</a:t>
             </a:r>
           </a:p>
           <a:p>
@@ -3297,32 +3316,13 @@
               </a:spcAft>
             </a:pPr>
             <a:r>
-              <a:rPr sz="1900" b="0" i="0">
+              <a:rPr sz="1700" b="0" i="0">
                 <a:solidFill>
                   <a:srgbClr val="1A1D24"/>
                 </a:solidFill>
                 <a:latin typeface="Segoe UI"/>
               </a:rPr>
-              <a:t>The network is not a player. Monte Carlo Tree Search turns it into one.</a:t>
-            </a:r>
-          </a:p>
-          <a:p>
-            <a:pPr algn="l">
-              <a:spcBef>
-                <a:spcPts val="0"/>
-              </a:spcBef>
-              <a:spcAft>
-                <a:spcPts val="1300"/>
-              </a:spcAft>
-            </a:pPr>
-            <a:r>
-              <a:rPr sz="1900" b="0" i="0">
-                <a:solidFill>
-                  <a:srgbClr val="1A1D24"/>
-                </a:solidFill>
-                <a:latin typeface="Segoe UI"/>
-              </a:rPr>
-              <a:t>Two stages: imitate humans, then improve by playing itself.</a:t>
+              <a:t>One network, two heads: policy (which moves look good) and value (who is winning). Monte Carlo Tree Search turns it into a player.</a:t>
             </a:r>
           </a:p>
         </p:txBody>
@@ -3574,7 +3574,7 @@
                 </a:solidFill>
                 <a:latin typeface="Segoe UI"/>
               </a:rPr>
-              <a:t>AlphaZero used ~5,000 TPUs. This runs on one desktop with an RTX 3060.</a:t>
+              <a:t>Silver et al., Science 2018. AlphaZero used ~5,000 TPUs; this runs on one desktop with an RTX 3060.</a:t>
             </a:r>
           </a:p>
         </p:txBody>
